--- a/_wp移行素材/★引継ぎ資料/★ASPATH_サイト運用マニュアル_AI活用編.pptx
+++ b/_wp移行素材/★引継ぎ資料/★ASPATH_サイト運用マニュアル_AI活用編.pptx
@@ -2014,7 +2014,7 @@
     <p:bg>
       <p:bgPr>
         <a:solidFill>
-          <a:srgbClr val="264653"/>
+          <a:srgbClr val="F4E9D8"/>
         </a:solidFill>
       </p:bgPr>
     </p:bg>
@@ -2034,30 +2034,94 @@
       </p:grpSpPr>
       <p:sp>
         <p:nvSpPr>
-          <p:cNvPr id="2" name="Text 0"/>
-          <p:cNvSpPr txBox="1"/>
-          <p:nvPr/>
-        </p:nvSpPr>
-        <p:spPr>
-          <a:xfrm>
-            <a:off x="822960" y="1325880"/>
-            <a:ext cx="7315200" cy="457200"/>
-          </a:xfrm>
-          <a:prstGeom prst="rect">
-            <a:avLst/>
-          </a:prstGeom>
-          <a:noFill/>
-          <a:ln/>
-        </p:spPr>
-        <p:txBody>
-          <a:bodyPr wrap="square" lIns="0" tIns="0" rIns="0" bIns="0" rtlCol="0" anchor="ctr"/>
-          <a:lstStyle/>
-          <a:p>
-            <a:pPr indent="0" marL="0">
-              <a:buNone/>
-            </a:pPr>
-            <a:r>
-              <a:rPr lang="en-US" sz="1700" b="1" spc="600" kern="0" dirty="0">
+          <p:cNvPr id="2" name="Shape 0"/>
+          <p:cNvSpPr/>
+          <p:nvPr/>
+        </p:nvSpPr>
+        <p:spPr>
+          <a:xfrm>
+            <a:off x="0" y="0"/>
+            <a:ext cx="12198096" cy="146304"/>
+          </a:xfrm>
+          <a:prstGeom prst="rect">
+            <a:avLst/>
+          </a:prstGeom>
+          <a:solidFill>
+            <a:srgbClr val="264653"/>
+          </a:solidFill>
+          <a:ln/>
+        </p:spPr>
+      </p:sp>
+      <p:sp>
+        <p:nvSpPr>
+          <p:cNvPr id="3" name="Shape 1"/>
+          <p:cNvSpPr/>
+          <p:nvPr/>
+        </p:nvSpPr>
+        <p:spPr>
+          <a:xfrm>
+            <a:off x="0" y="6711696"/>
+            <a:ext cx="12198096" cy="146304"/>
+          </a:xfrm>
+          <a:prstGeom prst="rect">
+            <a:avLst/>
+          </a:prstGeom>
+          <a:solidFill>
+            <a:srgbClr val="F4A261"/>
+          </a:solidFill>
+          <a:ln/>
+        </p:spPr>
+      </p:sp>
+      <p:pic>
+        <p:nvPicPr>
+          <p:cNvPr id="4" name="Image 0" descr="/sessions/compassionate-sweet-heisenberg/mnt/dev-aspath-life-main/tools/assets/logo-deck.png">    </p:cNvPr>
+          <p:cNvPicPr>
+            <a:picLocks noChangeAspect="1"/>
+          </p:cNvPicPr>
+          <p:nvPr/>
+        </p:nvPicPr>
+        <p:blipFill>
+          <a:blip r:embed="rId1"/>
+          <a:stretch>
+            <a:fillRect/>
+          </a:stretch>
+        </p:blipFill>
+        <p:spPr>
+          <a:xfrm>
+            <a:off x="1051560" y="1874520"/>
+            <a:ext cx="2320246" cy="2834640"/>
+          </a:xfrm>
+          <a:prstGeom prst="rect">
+            <a:avLst/>
+          </a:prstGeom>
+        </p:spPr>
+      </p:pic>
+      <p:sp>
+        <p:nvSpPr>
+          <p:cNvPr id="5" name="Text 2"/>
+          <p:cNvSpPr txBox="1"/>
+          <p:nvPr/>
+        </p:nvSpPr>
+        <p:spPr>
+          <a:xfrm>
+            <a:off x="4892040" y="1572768"/>
+            <a:ext cx="6675120" cy="384048"/>
+          </a:xfrm>
+          <a:prstGeom prst="rect">
+            <a:avLst/>
+          </a:prstGeom>
+          <a:noFill/>
+          <a:ln/>
+        </p:spPr>
+        <p:txBody>
+          <a:bodyPr wrap="square" lIns="0" tIns="0" rIns="0" bIns="0" rtlCol="0" anchor="ctr"/>
+          <a:lstStyle/>
+          <a:p>
+            <a:pPr indent="0" marL="0">
+              <a:buNone/>
+            </a:pPr>
+            <a:r>
+              <a:rPr lang="en-US" sz="1500" b="1" spc="600" kern="0" dirty="0">
                 <a:solidFill>
                   <a:srgbClr val="F4A261"/>
                 </a:solidFill>
@@ -2067,38 +2131,41 @@
               </a:rPr>
               <a:t>ASPATH</a:t>
             </a:r>
-            <a:endParaRPr lang="en-US" sz="1700" dirty="0"/>
-          </a:p>
-        </p:txBody>
-      </p:sp>
-      <p:sp>
-        <p:nvSpPr>
-          <p:cNvPr id="3" name="Text 1"/>
-          <p:cNvSpPr txBox="1"/>
-          <p:nvPr/>
-        </p:nvSpPr>
-        <p:spPr>
-          <a:xfrm>
-            <a:off x="822960" y="1874520"/>
-            <a:ext cx="10058400" cy="868680"/>
-          </a:xfrm>
-          <a:prstGeom prst="rect">
-            <a:avLst/>
-          </a:prstGeom>
-          <a:noFill/>
-          <a:ln/>
-        </p:spPr>
-        <p:txBody>
-          <a:bodyPr wrap="square" lIns="0" tIns="0" rIns="0" bIns="0" rtlCol="0" anchor="ctr"/>
-          <a:lstStyle/>
-          <a:p>
-            <a:pPr indent="0" marL="0">
-              <a:buNone/>
-            </a:pPr>
-            <a:r>
-              <a:rPr lang="en-US" sz="4200" b="1" dirty="0">
-                <a:solidFill>
-                  <a:srgbClr val="FFFFFF"/>
+            <a:endParaRPr lang="en-US" sz="1500" dirty="0"/>
+          </a:p>
+        </p:txBody>
+      </p:sp>
+      <p:sp>
+        <p:nvSpPr>
+          <p:cNvPr id="6" name="Text 3"/>
+          <p:cNvSpPr txBox="1"/>
+          <p:nvPr/>
+        </p:nvSpPr>
+        <p:spPr>
+          <a:xfrm>
+            <a:off x="4892040" y="1993392"/>
+            <a:ext cx="6675120" cy="914400"/>
+          </a:xfrm>
+          <a:prstGeom prst="rect">
+            <a:avLst/>
+          </a:prstGeom>
+          <a:noFill/>
+          <a:ln/>
+        </p:spPr>
+        <p:txBody>
+          <a:bodyPr wrap="square" lIns="0" tIns="0" rIns="0" bIns="0" rtlCol="0" anchor="ctr"/>
+          <a:lstStyle/>
+          <a:p>
+            <a:pPr indent="0" marL="0">
+              <a:lnSpc>
+                <a:spcPct val="120000"/>
+              </a:lnSpc>
+              <a:buNone/>
+            </a:pPr>
+            <a:r>
+              <a:rPr lang="en-US" sz="3600" b="1" dirty="0">
+                <a:solidFill>
+                  <a:srgbClr val="264653"/>
                 </a:solidFill>
                 <a:latin typeface="Meiryo" pitchFamily="34" charset="0"/>
                 <a:ea typeface="Meiryo" pitchFamily="34" charset="-122"/>
@@ -2106,20 +2173,20 @@
               </a:rPr>
               <a:t>サイト運用マニュアル</a:t>
             </a:r>
-            <a:endParaRPr lang="en-US" sz="4200" dirty="0"/>
-          </a:p>
-        </p:txBody>
-      </p:sp>
-      <p:sp>
-        <p:nvSpPr>
-          <p:cNvPr id="4" name="Shape 2"/>
+            <a:endParaRPr lang="en-US" sz="3600" dirty="0"/>
+          </a:p>
+        </p:txBody>
+      </p:sp>
+      <p:sp>
+        <p:nvSpPr>
+          <p:cNvPr id="7" name="Shape 4"/>
           <p:cNvSpPr/>
           <p:nvPr/>
         </p:nvSpPr>
         <p:spPr>
           <a:xfrm>
-            <a:off x="822960" y="2926080"/>
-            <a:ext cx="2651760" cy="585216"/>
+            <a:off x="4892040" y="2962656"/>
+            <a:ext cx="2651760" cy="548640"/>
           </a:xfrm>
           <a:prstGeom prst="roundRect">
             <a:avLst>
@@ -2134,14 +2201,14 @@
       </p:sp>
       <p:sp>
         <p:nvSpPr>
-          <p:cNvPr id="5" name="Text 3"/>
-          <p:cNvSpPr txBox="1"/>
-          <p:nvPr/>
-        </p:nvSpPr>
-        <p:spPr>
-          <a:xfrm>
-            <a:off x="822960" y="2926080"/>
-            <a:ext cx="2651760" cy="585216"/>
+          <p:cNvPr id="8" name="Text 5"/>
+          <p:cNvSpPr txBox="1"/>
+          <p:nvPr/>
+        </p:nvSpPr>
+        <p:spPr>
+          <a:xfrm>
+            <a:off x="4892040" y="2962656"/>
+            <a:ext cx="2651760" cy="548640"/>
           </a:xfrm>
           <a:prstGeom prst="rect">
             <a:avLst/>
@@ -2157,7 +2224,7 @@
               <a:buNone/>
             </a:pPr>
             <a:r>
-              <a:rPr lang="en-US" sz="1800" b="1" dirty="0">
+              <a:rPr lang="en-US" sz="1700" b="1" dirty="0">
                 <a:solidFill>
                   <a:srgbClr val="FFFFFF"/>
                 </a:solidFill>
@@ -2167,38 +2234,41 @@
               </a:rPr>
               <a:t>A I 活 用 編</a:t>
             </a:r>
-            <a:endParaRPr lang="en-US" sz="1800" dirty="0"/>
-          </a:p>
-        </p:txBody>
-      </p:sp>
-      <p:sp>
-        <p:nvSpPr>
-          <p:cNvPr id="6" name="Text 4"/>
-          <p:cNvSpPr txBox="1"/>
-          <p:nvPr/>
-        </p:nvSpPr>
-        <p:spPr>
-          <a:xfrm>
-            <a:off x="822960" y="3794760"/>
-            <a:ext cx="10058400" cy="411480"/>
-          </a:xfrm>
-          <a:prstGeom prst="rect">
-            <a:avLst/>
-          </a:prstGeom>
-          <a:noFill/>
-          <a:ln/>
-        </p:spPr>
-        <p:txBody>
-          <a:bodyPr wrap="square" lIns="0" tIns="0" rIns="0" bIns="0" rtlCol="0" anchor="ctr"/>
-          <a:lstStyle/>
-          <a:p>
-            <a:pPr indent="0" marL="0">
-              <a:buNone/>
-            </a:pPr>
-            <a:r>
-              <a:rPr lang="en-US" sz="1600" dirty="0">
-                <a:solidFill>
-                  <a:srgbClr val="CFE0E4"/>
+            <a:endParaRPr lang="en-US" sz="1700" dirty="0"/>
+          </a:p>
+        </p:txBody>
+      </p:sp>
+      <p:sp>
+        <p:nvSpPr>
+          <p:cNvPr id="9" name="Text 6"/>
+          <p:cNvSpPr txBox="1"/>
+          <p:nvPr/>
+        </p:nvSpPr>
+        <p:spPr>
+          <a:xfrm>
+            <a:off x="4892040" y="3749040"/>
+            <a:ext cx="6675120" cy="548640"/>
+          </a:xfrm>
+          <a:prstGeom prst="rect">
+            <a:avLst/>
+          </a:prstGeom>
+          <a:noFill/>
+          <a:ln/>
+        </p:spPr>
+        <p:txBody>
+          <a:bodyPr wrap="square" lIns="0" tIns="0" rIns="0" bIns="0" rtlCol="0" anchor="ctr"/>
+          <a:lstStyle/>
+          <a:p>
+            <a:pPr indent="0" marL="0">
+              <a:lnSpc>
+                <a:spcPct val="130000"/>
+              </a:lnSpc>
+              <a:buNone/>
+            </a:pPr>
+            <a:r>
+              <a:rPr lang="en-US" sz="1500" dirty="0">
+                <a:solidFill>
+                  <a:srgbClr val="52707A"/>
                 </a:solidFill>
                 <a:latin typeface="Meiryo" pitchFamily="34" charset="0"/>
                 <a:ea typeface="Meiryo" pitchFamily="34" charset="-122"/>
@@ -2206,38 +2276,19 @@
               </a:rPr>
               <a:t>そのまま貼って使えるプロンプト集</a:t>
             </a:r>
-            <a:endParaRPr lang="en-US" sz="1600" dirty="0"/>
-          </a:p>
-        </p:txBody>
-      </p:sp>
-      <p:sp>
-        <p:nvSpPr>
-          <p:cNvPr id="7" name="Text 5"/>
-          <p:cNvSpPr txBox="1"/>
-          <p:nvPr/>
-        </p:nvSpPr>
-        <p:spPr>
-          <a:xfrm>
-            <a:off x="822960" y="4343400"/>
-            <a:ext cx="10058400" cy="411480"/>
-          </a:xfrm>
-          <a:prstGeom prst="rect">
-            <a:avLst/>
-          </a:prstGeom>
-          <a:noFill/>
-          <a:ln/>
-        </p:spPr>
-        <p:txBody>
-          <a:bodyPr wrap="square" lIns="0" tIns="0" rIns="0" bIns="0" rtlCol="0" anchor="ctr"/>
-          <a:lstStyle/>
-          <a:p>
-            <a:pPr indent="0" marL="0">
-              <a:buNone/>
-            </a:pPr>
-            <a:r>
-              <a:rPr lang="en-US" sz="1300" dirty="0">
-                <a:solidFill>
-                  <a:srgbClr val="9FBAC1"/>
+            <a:endParaRPr lang="en-US" sz="1500" dirty="0"/>
+          </a:p>
+          <a:p>
+            <a:pPr indent="0" marL="0">
+              <a:lnSpc>
+                <a:spcPct val="130000"/>
+              </a:lnSpc>
+              <a:buNone/>
+            </a:pPr>
+            <a:r>
+              <a:rPr lang="en-US" sz="1500" dirty="0">
+                <a:solidFill>
+                  <a:srgbClr val="52707A"/>
                 </a:solidFill>
                 <a:latin typeface="Meiryo" pitchFamily="34" charset="0"/>
                 <a:ea typeface="Meiryo" pitchFamily="34" charset="-122"/>
@@ -2245,46 +2296,144 @@
               </a:rPr>
               <a:t>ChatGPT・Claude・Gemini、どれでも同じように使えます。</a:t>
             </a:r>
-            <a:endParaRPr lang="en-US" sz="1300" dirty="0"/>
-          </a:p>
-        </p:txBody>
-      </p:sp>
-      <p:sp>
-        <p:nvSpPr>
-          <p:cNvPr id="8" name="Text 6"/>
-          <p:cNvSpPr txBox="1"/>
-          <p:nvPr/>
-        </p:nvSpPr>
-        <p:spPr>
-          <a:xfrm>
-            <a:off x="822960" y="5760720"/>
-            <a:ext cx="7315200" cy="365760"/>
-          </a:xfrm>
-          <a:prstGeom prst="rect">
-            <a:avLst/>
-          </a:prstGeom>
-          <a:noFill/>
-          <a:ln/>
-        </p:spPr>
-        <p:txBody>
-          <a:bodyPr wrap="square" lIns="0" tIns="0" rIns="0" bIns="0" rtlCol="0" anchor="ctr"/>
-          <a:lstStyle/>
-          <a:p>
-            <a:pPr indent="0" marL="0">
-              <a:buNone/>
-            </a:pPr>
-            <a:r>
-              <a:rPr lang="en-US" sz="1200" dirty="0">
-                <a:solidFill>
-                  <a:srgbClr val="9FBAC1"/>
-                </a:solidFill>
-                <a:latin typeface="Meiryo" pitchFamily="34" charset="0"/>
-                <a:ea typeface="Meiryo" pitchFamily="34" charset="-122"/>
-                <a:cs typeface="Meiryo" pitchFamily="34" charset="-120"/>
-              </a:rPr>
-              <a:t>2026年9月　ASPATH 様　ご納品資料</a:t>
-            </a:r>
-            <a:endParaRPr lang="en-US" sz="1200" dirty="0"/>
+            <a:endParaRPr lang="en-US" sz="1500" dirty="0"/>
+          </a:p>
+        </p:txBody>
+      </p:sp>
+      <p:sp>
+        <p:nvSpPr>
+          <p:cNvPr id="10" name="Shape 7"/>
+          <p:cNvSpPr/>
+          <p:nvPr/>
+        </p:nvSpPr>
+        <p:spPr>
+          <a:xfrm>
+            <a:off x="4892040" y="4736592"/>
+            <a:ext cx="1828800" cy="18288"/>
+          </a:xfrm>
+          <a:prstGeom prst="rect">
+            <a:avLst/>
+          </a:prstGeom>
+          <a:solidFill>
+            <a:srgbClr val="F4A261"/>
+          </a:solidFill>
+          <a:ln/>
+        </p:spPr>
+      </p:sp>
+      <p:sp>
+        <p:nvSpPr>
+          <p:cNvPr id="11" name="Text 8"/>
+          <p:cNvSpPr txBox="1"/>
+          <p:nvPr/>
+        </p:nvSpPr>
+        <p:spPr>
+          <a:xfrm>
+            <a:off x="4892040" y="4864608"/>
+            <a:ext cx="6675120" cy="292608"/>
+          </a:xfrm>
+          <a:prstGeom prst="rect">
+            <a:avLst/>
+          </a:prstGeom>
+          <a:noFill/>
+          <a:ln/>
+        </p:spPr>
+        <p:txBody>
+          <a:bodyPr wrap="square" lIns="0" tIns="0" rIns="0" bIns="0" rtlCol="0" anchor="ctr"/>
+          <a:lstStyle/>
+          <a:p>
+            <a:pPr indent="0" marL="0">
+              <a:buNone/>
+            </a:pPr>
+            <a:r>
+              <a:rPr lang="en-US" sz="1250" b="1" dirty="0">
+                <a:solidFill>
+                  <a:srgbClr val="264653"/>
+                </a:solidFill>
+                <a:latin typeface="Meiryo" pitchFamily="34" charset="0"/>
+                <a:ea typeface="Meiryo" pitchFamily="34" charset="-122"/>
+                <a:cs typeface="Meiryo" pitchFamily="34" charset="-120"/>
+              </a:rPr>
+              <a:t>鹿児島のパーキンソン病専門トレーニングスタジオ</a:t>
+            </a:r>
+            <a:endParaRPr lang="en-US" sz="1250" dirty="0"/>
+          </a:p>
+        </p:txBody>
+      </p:sp>
+      <p:sp>
+        <p:nvSpPr>
+          <p:cNvPr id="12" name="Text 9"/>
+          <p:cNvSpPr txBox="1"/>
+          <p:nvPr/>
+        </p:nvSpPr>
+        <p:spPr>
+          <a:xfrm>
+            <a:off x="4892040" y="5193792"/>
+            <a:ext cx="6675120" cy="274320"/>
+          </a:xfrm>
+          <a:prstGeom prst="rect">
+            <a:avLst/>
+          </a:prstGeom>
+          <a:noFill/>
+          <a:ln/>
+        </p:spPr>
+        <p:txBody>
+          <a:bodyPr wrap="square" lIns="0" tIns="0" rIns="0" bIns="0" rtlCol="0" anchor="ctr"/>
+          <a:lstStyle/>
+          <a:p>
+            <a:pPr indent="0" marL="0">
+              <a:buNone/>
+            </a:pPr>
+            <a:r>
+              <a:rPr lang="en-US" sz="1150" dirty="0">
+                <a:solidFill>
+                  <a:srgbClr val="52707A"/>
+                </a:solidFill>
+                <a:latin typeface="Meiryo" pitchFamily="34" charset="0"/>
+                <a:ea typeface="Meiryo" pitchFamily="34" charset="-122"/>
+                <a:cs typeface="Meiryo" pitchFamily="34" charset="-120"/>
+              </a:rPr>
+              <a:t>動くことを楽しむ。明日につながる。</a:t>
+            </a:r>
+            <a:endParaRPr lang="en-US" sz="1150" dirty="0"/>
+          </a:p>
+        </p:txBody>
+      </p:sp>
+      <p:sp>
+        <p:nvSpPr>
+          <p:cNvPr id="13" name="Text 10"/>
+          <p:cNvSpPr txBox="1"/>
+          <p:nvPr/>
+        </p:nvSpPr>
+        <p:spPr>
+          <a:xfrm>
+            <a:off x="4892040" y="5596128"/>
+            <a:ext cx="6675120" cy="274320"/>
+          </a:xfrm>
+          <a:prstGeom prst="rect">
+            <a:avLst/>
+          </a:prstGeom>
+          <a:noFill/>
+          <a:ln/>
+        </p:spPr>
+        <p:txBody>
+          <a:bodyPr wrap="square" lIns="0" tIns="0" rIns="0" bIns="0" rtlCol="0" anchor="ctr"/>
+          <a:lstStyle/>
+          <a:p>
+            <a:pPr indent="0" marL="0">
+              <a:buNone/>
+            </a:pPr>
+            <a:r>
+              <a:rPr lang="en-US" sz="1050" dirty="0">
+                <a:solidFill>
+                  <a:srgbClr val="8A9CA2"/>
+                </a:solidFill>
+                <a:latin typeface="Meiryo" pitchFamily="34" charset="0"/>
+                <a:ea typeface="Meiryo" pitchFamily="34" charset="-122"/>
+                <a:cs typeface="Meiryo" pitchFamily="34" charset="-120"/>
+              </a:rPr>
+              <a:t>aspath-life.com　／　2026年9月　ASPATH 様　ご納品資料</a:t>
+            </a:r>
+            <a:endParaRPr lang="en-US" sz="1050" dirty="0"/>
           </a:p>
         </p:txBody>
       </p:sp>
@@ -2320,9 +2469,72 @@
           <a:chExt cx="0" cy="0"/>
         </a:xfrm>
       </p:grpSpPr>
-      <p:sp>
-        <p:nvSpPr>
-          <p:cNvPr id="2" name="Text 0"/>
+      <p:pic>
+        <p:nvPicPr>
+          <p:cNvPr id="2" name="Image 0" descr="/sessions/compassionate-sweet-heisenberg/mnt/dev-aspath-life-main/tools/assets/logo-deck.png">    </p:cNvPr>
+          <p:cNvPicPr>
+            <a:picLocks noChangeAspect="1"/>
+          </p:cNvPicPr>
+          <p:nvPr/>
+        </p:nvPicPr>
+        <p:blipFill>
+          <a:blip r:embed="rId1"/>
+          <a:stretch>
+            <a:fillRect/>
+          </a:stretch>
+        </p:blipFill>
+        <p:spPr>
+          <a:xfrm>
+            <a:off x="11458173" y="109728"/>
+            <a:ext cx="209571" cy="256032"/>
+          </a:xfrm>
+          <a:prstGeom prst="rect">
+            <a:avLst/>
+          </a:prstGeom>
+        </p:spPr>
+      </p:pic>
+      <p:sp>
+        <p:nvSpPr>
+          <p:cNvPr id="3" name="Text 0"/>
+          <p:cNvSpPr txBox="1"/>
+          <p:nvPr/>
+        </p:nvSpPr>
+        <p:spPr>
+          <a:xfrm>
+            <a:off x="8623533" y="128016"/>
+            <a:ext cx="2743200" cy="237744"/>
+          </a:xfrm>
+          <a:prstGeom prst="rect">
+            <a:avLst/>
+          </a:prstGeom>
+          <a:noFill/>
+          <a:ln/>
+        </p:spPr>
+        <p:txBody>
+          <a:bodyPr wrap="square" lIns="0" tIns="0" rIns="0" bIns="0" rtlCol="0" anchor="ctr"/>
+          <a:lstStyle/>
+          <a:p>
+            <a:pPr algn="r" indent="0" marL="0">
+              <a:buNone/>
+            </a:pPr>
+            <a:r>
+              <a:rPr lang="en-US" sz="750" dirty="0">
+                <a:solidFill>
+                  <a:srgbClr val="97A9AF"/>
+                </a:solidFill>
+                <a:latin typeface="Meiryo" pitchFamily="34" charset="0"/>
+                <a:ea typeface="Meiryo" pitchFamily="34" charset="-122"/>
+                <a:cs typeface="Meiryo" pitchFamily="34" charset="-120"/>
+              </a:rPr>
+              <a:t>鹿児島のパーキンソン病専門トレーニングスタジオ</a:t>
+            </a:r>
+            <a:endParaRPr lang="en-US" sz="750" dirty="0"/>
+          </a:p>
+        </p:txBody>
+      </p:sp>
+      <p:sp>
+        <p:nvSpPr>
+          <p:cNvPr id="4" name="Text 1"/>
           <p:cNvSpPr txBox="1"/>
           <p:nvPr/>
         </p:nvSpPr>
@@ -2361,7 +2573,7 @@
       </p:sp>
       <p:sp>
         <p:nvSpPr>
-          <p:cNvPr id="3" name="Text 1"/>
+          <p:cNvPr id="5" name="Text 2"/>
           <p:cNvSpPr txBox="1"/>
           <p:nvPr/>
         </p:nvSpPr>
@@ -2400,7 +2612,7 @@
       </p:sp>
       <p:sp>
         <p:nvSpPr>
-          <p:cNvPr id="4" name="Text 2"/>
+          <p:cNvPr id="6" name="Text 3"/>
           <p:cNvSpPr txBox="1"/>
           <p:nvPr/>
         </p:nvSpPr>
@@ -2439,7 +2651,7 @@
       </p:sp>
       <p:sp>
         <p:nvSpPr>
-          <p:cNvPr id="5" name="Shape 3"/>
+          <p:cNvPr id="7" name="Shape 4"/>
           <p:cNvSpPr/>
           <p:nvPr/>
         </p:nvSpPr>
@@ -2466,7 +2678,7 @@
       </p:sp>
       <p:sp>
         <p:nvSpPr>
-          <p:cNvPr id="6" name="Shape 4"/>
+          <p:cNvPr id="8" name="Shape 5"/>
           <p:cNvSpPr/>
           <p:nvPr/>
         </p:nvSpPr>
@@ -2488,7 +2700,7 @@
       </p:sp>
       <p:sp>
         <p:nvSpPr>
-          <p:cNvPr id="7" name="Text 5"/>
+          <p:cNvPr id="9" name="Text 6"/>
           <p:cNvSpPr txBox="1"/>
           <p:nvPr/>
         </p:nvSpPr>
@@ -2527,7 +2739,7 @@
       </p:sp>
       <p:sp>
         <p:nvSpPr>
-          <p:cNvPr id="8" name="Text 6"/>
+          <p:cNvPr id="10" name="Text 7"/>
           <p:cNvSpPr txBox="1"/>
           <p:nvPr/>
         </p:nvSpPr>
@@ -2807,7 +3019,7 @@
       </p:sp>
       <p:sp>
         <p:nvSpPr>
-          <p:cNvPr id="9" name="Text 7"/>
+          <p:cNvPr id="11" name="Text 8"/>
           <p:cNvSpPr txBox="1"/>
           <p:nvPr/>
         </p:nvSpPr>
@@ -2846,7 +3058,7 @@
       </p:sp>
       <p:sp>
         <p:nvSpPr>
-          <p:cNvPr id="10" name="Shape 8"/>
+          <p:cNvPr id="12" name="Shape 9"/>
           <p:cNvSpPr/>
           <p:nvPr/>
         </p:nvSpPr>
@@ -2873,7 +3085,7 @@
       </p:sp>
       <p:sp>
         <p:nvSpPr>
-          <p:cNvPr id="11" name="Text 9"/>
+          <p:cNvPr id="13" name="Text 10"/>
           <p:cNvSpPr txBox="1"/>
           <p:nvPr/>
         </p:nvSpPr>
@@ -2915,7 +3127,7 @@
       </p:sp>
       <p:sp>
         <p:nvSpPr>
-          <p:cNvPr id="12" name="Shape 10"/>
+          <p:cNvPr id="14" name="Shape 11"/>
           <p:cNvSpPr/>
           <p:nvPr/>
         </p:nvSpPr>
@@ -2942,7 +3154,7 @@
       </p:sp>
       <p:sp>
         <p:nvSpPr>
-          <p:cNvPr id="13" name="Text 11"/>
+          <p:cNvPr id="15" name="Text 12"/>
           <p:cNvSpPr txBox="1"/>
           <p:nvPr/>
         </p:nvSpPr>
@@ -2984,7 +3196,7 @@
       </p:sp>
       <p:sp>
         <p:nvSpPr>
-          <p:cNvPr id="14" name="Shape 12"/>
+          <p:cNvPr id="16" name="Shape 13"/>
           <p:cNvSpPr/>
           <p:nvPr/>
         </p:nvSpPr>
@@ -3011,7 +3223,7 @@
       </p:sp>
       <p:sp>
         <p:nvSpPr>
-          <p:cNvPr id="15" name="Shape 13"/>
+          <p:cNvPr id="17" name="Shape 14"/>
           <p:cNvSpPr/>
           <p:nvPr/>
         </p:nvSpPr>
@@ -3031,7 +3243,7 @@
       </p:sp>
       <p:sp>
         <p:nvSpPr>
-          <p:cNvPr id="16" name="Text 14"/>
+          <p:cNvPr id="18" name="Text 15"/>
           <p:cNvSpPr txBox="1"/>
           <p:nvPr/>
         </p:nvSpPr>
@@ -3070,7 +3282,7 @@
       </p:sp>
       <p:sp>
         <p:nvSpPr>
-          <p:cNvPr id="17" name="Text 15"/>
+          <p:cNvPr id="19" name="Text 16"/>
           <p:cNvSpPr txBox="1"/>
           <p:nvPr/>
         </p:nvSpPr>
@@ -3132,7 +3344,7 @@
       </p:sp>
       <p:sp>
         <p:nvSpPr>
-          <p:cNvPr id="18" name="Shape 16"/>
+          <p:cNvPr id="20" name="Shape 17"/>
           <p:cNvSpPr/>
           <p:nvPr/>
         </p:nvSpPr>
@@ -3159,7 +3371,7 @@
       </p:sp>
       <p:sp>
         <p:nvSpPr>
-          <p:cNvPr id="19" name="Shape 17"/>
+          <p:cNvPr id="21" name="Shape 18"/>
           <p:cNvSpPr/>
           <p:nvPr/>
         </p:nvSpPr>
@@ -3179,7 +3391,7 @@
       </p:sp>
       <p:sp>
         <p:nvSpPr>
-          <p:cNvPr id="20" name="Text 18"/>
+          <p:cNvPr id="22" name="Text 19"/>
           <p:cNvSpPr txBox="1"/>
           <p:nvPr/>
         </p:nvSpPr>
@@ -3218,7 +3430,7 @@
       </p:sp>
       <p:sp>
         <p:nvSpPr>
-          <p:cNvPr id="21" name="Text 19"/>
+          <p:cNvPr id="23" name="Text 20"/>
           <p:cNvSpPr txBox="1"/>
           <p:nvPr/>
         </p:nvSpPr>
@@ -3296,9 +3508,72 @@
           <a:chExt cx="0" cy="0"/>
         </a:xfrm>
       </p:grpSpPr>
-      <p:sp>
-        <p:nvSpPr>
-          <p:cNvPr id="2" name="Text 0"/>
+      <p:pic>
+        <p:nvPicPr>
+          <p:cNvPr id="2" name="Image 0" descr="/sessions/compassionate-sweet-heisenberg/mnt/dev-aspath-life-main/tools/assets/logo-deck.png">    </p:cNvPr>
+          <p:cNvPicPr>
+            <a:picLocks noChangeAspect="1"/>
+          </p:cNvPicPr>
+          <p:nvPr/>
+        </p:nvPicPr>
+        <p:blipFill>
+          <a:blip r:embed="rId1"/>
+          <a:stretch>
+            <a:fillRect/>
+          </a:stretch>
+        </p:blipFill>
+        <p:spPr>
+          <a:xfrm>
+            <a:off x="11458173" y="109728"/>
+            <a:ext cx="209571" cy="256032"/>
+          </a:xfrm>
+          <a:prstGeom prst="rect">
+            <a:avLst/>
+          </a:prstGeom>
+        </p:spPr>
+      </p:pic>
+      <p:sp>
+        <p:nvSpPr>
+          <p:cNvPr id="3" name="Text 0"/>
+          <p:cNvSpPr txBox="1"/>
+          <p:nvPr/>
+        </p:nvSpPr>
+        <p:spPr>
+          <a:xfrm>
+            <a:off x="8623533" y="128016"/>
+            <a:ext cx="2743200" cy="237744"/>
+          </a:xfrm>
+          <a:prstGeom prst="rect">
+            <a:avLst/>
+          </a:prstGeom>
+          <a:noFill/>
+          <a:ln/>
+        </p:spPr>
+        <p:txBody>
+          <a:bodyPr wrap="square" lIns="0" tIns="0" rIns="0" bIns="0" rtlCol="0" anchor="ctr"/>
+          <a:lstStyle/>
+          <a:p>
+            <a:pPr algn="r" indent="0" marL="0">
+              <a:buNone/>
+            </a:pPr>
+            <a:r>
+              <a:rPr lang="en-US" sz="750" dirty="0">
+                <a:solidFill>
+                  <a:srgbClr val="97A9AF"/>
+                </a:solidFill>
+                <a:latin typeface="Meiryo" pitchFamily="34" charset="0"/>
+                <a:ea typeface="Meiryo" pitchFamily="34" charset="-122"/>
+                <a:cs typeface="Meiryo" pitchFamily="34" charset="-120"/>
+              </a:rPr>
+              <a:t>鹿児島のパーキンソン病専門トレーニングスタジオ</a:t>
+            </a:r>
+            <a:endParaRPr lang="en-US" sz="750" dirty="0"/>
+          </a:p>
+        </p:txBody>
+      </p:sp>
+      <p:sp>
+        <p:nvSpPr>
+          <p:cNvPr id="4" name="Text 1"/>
           <p:cNvSpPr txBox="1"/>
           <p:nvPr/>
         </p:nvSpPr>
@@ -3337,7 +3612,7 @@
       </p:sp>
       <p:sp>
         <p:nvSpPr>
-          <p:cNvPr id="3" name="Text 1"/>
+          <p:cNvPr id="5" name="Text 2"/>
           <p:cNvSpPr txBox="1"/>
           <p:nvPr/>
         </p:nvSpPr>
@@ -3376,7 +3651,7 @@
       </p:sp>
       <p:sp>
         <p:nvSpPr>
-          <p:cNvPr id="4" name="Text 2"/>
+          <p:cNvPr id="6" name="Text 3"/>
           <p:cNvSpPr txBox="1"/>
           <p:nvPr/>
         </p:nvSpPr>
@@ -3415,7 +3690,7 @@
       </p:sp>
       <p:sp>
         <p:nvSpPr>
-          <p:cNvPr id="5" name="Shape 3"/>
+          <p:cNvPr id="7" name="Shape 4"/>
           <p:cNvSpPr/>
           <p:nvPr/>
         </p:nvSpPr>
@@ -3442,7 +3717,7 @@
       </p:sp>
       <p:sp>
         <p:nvSpPr>
-          <p:cNvPr id="6" name="Shape 4"/>
+          <p:cNvPr id="8" name="Shape 5"/>
           <p:cNvSpPr/>
           <p:nvPr/>
         </p:nvSpPr>
@@ -3464,7 +3739,7 @@
       </p:sp>
       <p:sp>
         <p:nvSpPr>
-          <p:cNvPr id="7" name="Text 5"/>
+          <p:cNvPr id="9" name="Text 6"/>
           <p:cNvSpPr txBox="1"/>
           <p:nvPr/>
         </p:nvSpPr>
@@ -3503,7 +3778,7 @@
       </p:sp>
       <p:sp>
         <p:nvSpPr>
-          <p:cNvPr id="8" name="Text 6"/>
+          <p:cNvPr id="10" name="Text 7"/>
           <p:cNvSpPr txBox="1"/>
           <p:nvPr/>
         </p:nvSpPr>
@@ -3723,7 +3998,7 @@
       </p:sp>
       <p:sp>
         <p:nvSpPr>
-          <p:cNvPr id="9" name="Text 7"/>
+          <p:cNvPr id="11" name="Text 8"/>
           <p:cNvSpPr txBox="1"/>
           <p:nvPr/>
         </p:nvSpPr>
@@ -3762,7 +4037,7 @@
       </p:sp>
       <p:sp>
         <p:nvSpPr>
-          <p:cNvPr id="10" name="Shape 8"/>
+          <p:cNvPr id="12" name="Shape 9"/>
           <p:cNvSpPr/>
           <p:nvPr/>
         </p:nvSpPr>
@@ -3789,7 +4064,7 @@
       </p:sp>
       <p:sp>
         <p:nvSpPr>
-          <p:cNvPr id="11" name="Text 9"/>
+          <p:cNvPr id="13" name="Text 10"/>
           <p:cNvSpPr txBox="1"/>
           <p:nvPr/>
         </p:nvSpPr>
@@ -3831,7 +4106,7 @@
       </p:sp>
       <p:sp>
         <p:nvSpPr>
-          <p:cNvPr id="12" name="Shape 10"/>
+          <p:cNvPr id="14" name="Shape 11"/>
           <p:cNvSpPr/>
           <p:nvPr/>
         </p:nvSpPr>
@@ -3858,7 +4133,7 @@
       </p:sp>
       <p:sp>
         <p:nvSpPr>
-          <p:cNvPr id="13" name="Text 11"/>
+          <p:cNvPr id="15" name="Text 12"/>
           <p:cNvSpPr txBox="1"/>
           <p:nvPr/>
         </p:nvSpPr>
@@ -3900,7 +4175,7 @@
       </p:sp>
       <p:sp>
         <p:nvSpPr>
-          <p:cNvPr id="14" name="Shape 12"/>
+          <p:cNvPr id="16" name="Shape 13"/>
           <p:cNvSpPr/>
           <p:nvPr/>
         </p:nvSpPr>
@@ -3927,7 +4202,7 @@
       </p:sp>
       <p:sp>
         <p:nvSpPr>
-          <p:cNvPr id="15" name="Shape 13"/>
+          <p:cNvPr id="17" name="Shape 14"/>
           <p:cNvSpPr/>
           <p:nvPr/>
         </p:nvSpPr>
@@ -3947,7 +4222,7 @@
       </p:sp>
       <p:sp>
         <p:nvSpPr>
-          <p:cNvPr id="16" name="Text 14"/>
+          <p:cNvPr id="18" name="Text 15"/>
           <p:cNvSpPr txBox="1"/>
           <p:nvPr/>
         </p:nvSpPr>
@@ -3986,7 +4261,7 @@
       </p:sp>
       <p:sp>
         <p:nvSpPr>
-          <p:cNvPr id="17" name="Text 15"/>
+          <p:cNvPr id="19" name="Text 16"/>
           <p:cNvSpPr txBox="1"/>
           <p:nvPr/>
         </p:nvSpPr>
@@ -4048,7 +4323,7 @@
       </p:sp>
       <p:sp>
         <p:nvSpPr>
-          <p:cNvPr id="18" name="Shape 16"/>
+          <p:cNvPr id="20" name="Shape 17"/>
           <p:cNvSpPr/>
           <p:nvPr/>
         </p:nvSpPr>
@@ -4075,7 +4350,7 @@
       </p:sp>
       <p:sp>
         <p:nvSpPr>
-          <p:cNvPr id="19" name="Shape 17"/>
+          <p:cNvPr id="21" name="Shape 18"/>
           <p:cNvSpPr/>
           <p:nvPr/>
         </p:nvSpPr>
@@ -4095,7 +4370,7 @@
       </p:sp>
       <p:sp>
         <p:nvSpPr>
-          <p:cNvPr id="20" name="Text 18"/>
+          <p:cNvPr id="22" name="Text 19"/>
           <p:cNvSpPr txBox="1"/>
           <p:nvPr/>
         </p:nvSpPr>
@@ -4134,7 +4409,7 @@
       </p:sp>
       <p:sp>
         <p:nvSpPr>
-          <p:cNvPr id="21" name="Text 19"/>
+          <p:cNvPr id="23" name="Text 20"/>
           <p:cNvSpPr txBox="1"/>
           <p:nvPr/>
         </p:nvSpPr>
@@ -4212,9 +4487,72 @@
           <a:chExt cx="0" cy="0"/>
         </a:xfrm>
       </p:grpSpPr>
-      <p:sp>
-        <p:nvSpPr>
-          <p:cNvPr id="2" name="Text 0"/>
+      <p:pic>
+        <p:nvPicPr>
+          <p:cNvPr id="2" name="Image 0" descr="/sessions/compassionate-sweet-heisenberg/mnt/dev-aspath-life-main/tools/assets/logo-deck.png">    </p:cNvPr>
+          <p:cNvPicPr>
+            <a:picLocks noChangeAspect="1"/>
+          </p:cNvPicPr>
+          <p:nvPr/>
+        </p:nvPicPr>
+        <p:blipFill>
+          <a:blip r:embed="rId1"/>
+          <a:stretch>
+            <a:fillRect/>
+          </a:stretch>
+        </p:blipFill>
+        <p:spPr>
+          <a:xfrm>
+            <a:off x="11458173" y="109728"/>
+            <a:ext cx="209571" cy="256032"/>
+          </a:xfrm>
+          <a:prstGeom prst="rect">
+            <a:avLst/>
+          </a:prstGeom>
+        </p:spPr>
+      </p:pic>
+      <p:sp>
+        <p:nvSpPr>
+          <p:cNvPr id="3" name="Text 0"/>
+          <p:cNvSpPr txBox="1"/>
+          <p:nvPr/>
+        </p:nvSpPr>
+        <p:spPr>
+          <a:xfrm>
+            <a:off x="8623533" y="128016"/>
+            <a:ext cx="2743200" cy="237744"/>
+          </a:xfrm>
+          <a:prstGeom prst="rect">
+            <a:avLst/>
+          </a:prstGeom>
+          <a:noFill/>
+          <a:ln/>
+        </p:spPr>
+        <p:txBody>
+          <a:bodyPr wrap="square" lIns="0" tIns="0" rIns="0" bIns="0" rtlCol="0" anchor="ctr"/>
+          <a:lstStyle/>
+          <a:p>
+            <a:pPr algn="r" indent="0" marL="0">
+              <a:buNone/>
+            </a:pPr>
+            <a:r>
+              <a:rPr lang="en-US" sz="750" dirty="0">
+                <a:solidFill>
+                  <a:srgbClr val="97A9AF"/>
+                </a:solidFill>
+                <a:latin typeface="Meiryo" pitchFamily="34" charset="0"/>
+                <a:ea typeface="Meiryo" pitchFamily="34" charset="-122"/>
+                <a:cs typeface="Meiryo" pitchFamily="34" charset="-120"/>
+              </a:rPr>
+              <a:t>鹿児島のパーキンソン病専門トレーニングスタジオ</a:t>
+            </a:r>
+            <a:endParaRPr lang="en-US" sz="750" dirty="0"/>
+          </a:p>
+        </p:txBody>
+      </p:sp>
+      <p:sp>
+        <p:nvSpPr>
+          <p:cNvPr id="4" name="Text 1"/>
           <p:cNvSpPr txBox="1"/>
           <p:nvPr/>
         </p:nvSpPr>
@@ -4253,7 +4591,7 @@
       </p:sp>
       <p:sp>
         <p:nvSpPr>
-          <p:cNvPr id="3" name="Text 1"/>
+          <p:cNvPr id="5" name="Text 2"/>
           <p:cNvSpPr txBox="1"/>
           <p:nvPr/>
         </p:nvSpPr>
@@ -4292,7 +4630,7 @@
       </p:sp>
       <p:sp>
         <p:nvSpPr>
-          <p:cNvPr id="4" name="Text 2"/>
+          <p:cNvPr id="6" name="Text 3"/>
           <p:cNvSpPr txBox="1"/>
           <p:nvPr/>
         </p:nvSpPr>
@@ -4331,7 +4669,7 @@
       </p:sp>
       <p:sp>
         <p:nvSpPr>
-          <p:cNvPr id="5" name="Shape 3"/>
+          <p:cNvPr id="7" name="Shape 4"/>
           <p:cNvSpPr/>
           <p:nvPr/>
         </p:nvSpPr>
@@ -4358,7 +4696,7 @@
       </p:sp>
       <p:sp>
         <p:nvSpPr>
-          <p:cNvPr id="6" name="Shape 4"/>
+          <p:cNvPr id="8" name="Shape 5"/>
           <p:cNvSpPr/>
           <p:nvPr/>
         </p:nvSpPr>
@@ -4380,7 +4718,7 @@
       </p:sp>
       <p:sp>
         <p:nvSpPr>
-          <p:cNvPr id="7" name="Text 5"/>
+          <p:cNvPr id="9" name="Text 6"/>
           <p:cNvSpPr txBox="1"/>
           <p:nvPr/>
         </p:nvSpPr>
@@ -4419,7 +4757,7 @@
       </p:sp>
       <p:sp>
         <p:nvSpPr>
-          <p:cNvPr id="8" name="Text 6"/>
+          <p:cNvPr id="10" name="Text 7"/>
           <p:cNvSpPr txBox="1"/>
           <p:nvPr/>
         </p:nvSpPr>
@@ -4728,7 +5066,7 @@
       </p:sp>
       <p:sp>
         <p:nvSpPr>
-          <p:cNvPr id="9" name="Text 7"/>
+          <p:cNvPr id="11" name="Text 8"/>
           <p:cNvSpPr txBox="1"/>
           <p:nvPr/>
         </p:nvSpPr>
@@ -4767,7 +5105,7 @@
       </p:sp>
       <p:sp>
         <p:nvSpPr>
-          <p:cNvPr id="10" name="Shape 8"/>
+          <p:cNvPr id="12" name="Shape 9"/>
           <p:cNvSpPr/>
           <p:nvPr/>
         </p:nvSpPr>
@@ -4794,7 +5132,7 @@
       </p:sp>
       <p:sp>
         <p:nvSpPr>
-          <p:cNvPr id="11" name="Text 9"/>
+          <p:cNvPr id="13" name="Text 10"/>
           <p:cNvSpPr txBox="1"/>
           <p:nvPr/>
         </p:nvSpPr>
@@ -4833,7 +5171,7 @@
       </p:sp>
       <p:sp>
         <p:nvSpPr>
-          <p:cNvPr id="12" name="Text 10"/>
+          <p:cNvPr id="14" name="Text 11"/>
           <p:cNvSpPr txBox="1"/>
           <p:nvPr/>
         </p:nvSpPr>
@@ -4872,7 +5210,7 @@
       </p:sp>
       <p:sp>
         <p:nvSpPr>
-          <p:cNvPr id="13" name="Shape 11"/>
+          <p:cNvPr id="15" name="Shape 12"/>
           <p:cNvSpPr/>
           <p:nvPr/>
         </p:nvSpPr>
@@ -4899,7 +5237,7 @@
       </p:sp>
       <p:sp>
         <p:nvSpPr>
-          <p:cNvPr id="14" name="Text 12"/>
+          <p:cNvPr id="16" name="Text 13"/>
           <p:cNvSpPr txBox="1"/>
           <p:nvPr/>
         </p:nvSpPr>
@@ -4938,7 +5276,7 @@
       </p:sp>
       <p:sp>
         <p:nvSpPr>
-          <p:cNvPr id="15" name="Text 13"/>
+          <p:cNvPr id="17" name="Text 14"/>
           <p:cNvSpPr txBox="1"/>
           <p:nvPr/>
         </p:nvSpPr>
@@ -4977,7 +5315,7 @@
       </p:sp>
       <p:sp>
         <p:nvSpPr>
-          <p:cNvPr id="16" name="Shape 14"/>
+          <p:cNvPr id="18" name="Shape 15"/>
           <p:cNvSpPr/>
           <p:nvPr/>
         </p:nvSpPr>
@@ -5004,7 +5342,7 @@
       </p:sp>
       <p:sp>
         <p:nvSpPr>
-          <p:cNvPr id="17" name="Text 15"/>
+          <p:cNvPr id="19" name="Text 16"/>
           <p:cNvSpPr txBox="1"/>
           <p:nvPr/>
         </p:nvSpPr>
@@ -5043,7 +5381,7 @@
       </p:sp>
       <p:sp>
         <p:nvSpPr>
-          <p:cNvPr id="18" name="Text 16"/>
+          <p:cNvPr id="20" name="Text 17"/>
           <p:cNvSpPr txBox="1"/>
           <p:nvPr/>
         </p:nvSpPr>
@@ -5082,7 +5420,7 @@
       </p:sp>
       <p:sp>
         <p:nvSpPr>
-          <p:cNvPr id="19" name="Shape 17"/>
+          <p:cNvPr id="21" name="Shape 18"/>
           <p:cNvSpPr/>
           <p:nvPr/>
         </p:nvSpPr>
@@ -5109,7 +5447,7 @@
       </p:sp>
       <p:sp>
         <p:nvSpPr>
-          <p:cNvPr id="20" name="Shape 18"/>
+          <p:cNvPr id="22" name="Shape 19"/>
           <p:cNvSpPr/>
           <p:nvPr/>
         </p:nvSpPr>
@@ -5129,7 +5467,7 @@
       </p:sp>
       <p:sp>
         <p:nvSpPr>
-          <p:cNvPr id="21" name="Text 19"/>
+          <p:cNvPr id="23" name="Text 20"/>
           <p:cNvSpPr txBox="1"/>
           <p:nvPr/>
         </p:nvSpPr>
@@ -5168,7 +5506,7 @@
       </p:sp>
       <p:sp>
         <p:nvSpPr>
-          <p:cNvPr id="22" name="Text 20"/>
+          <p:cNvPr id="24" name="Text 21"/>
           <p:cNvSpPr txBox="1"/>
           <p:nvPr/>
         </p:nvSpPr>
@@ -5230,7 +5568,7 @@
       </p:sp>
       <p:sp>
         <p:nvSpPr>
-          <p:cNvPr id="23" name="Shape 21"/>
+          <p:cNvPr id="25" name="Shape 22"/>
           <p:cNvSpPr/>
           <p:nvPr/>
         </p:nvSpPr>
@@ -5257,7 +5595,7 @@
       </p:sp>
       <p:sp>
         <p:nvSpPr>
-          <p:cNvPr id="24" name="Shape 22"/>
+          <p:cNvPr id="26" name="Shape 23"/>
           <p:cNvSpPr/>
           <p:nvPr/>
         </p:nvSpPr>
@@ -5277,7 +5615,7 @@
       </p:sp>
       <p:sp>
         <p:nvSpPr>
-          <p:cNvPr id="25" name="Text 23"/>
+          <p:cNvPr id="27" name="Text 24"/>
           <p:cNvSpPr txBox="1"/>
           <p:nvPr/>
         </p:nvSpPr>
@@ -5316,7 +5654,7 @@
       </p:sp>
       <p:sp>
         <p:nvSpPr>
-          <p:cNvPr id="26" name="Text 24"/>
+          <p:cNvPr id="28" name="Text 25"/>
           <p:cNvSpPr txBox="1"/>
           <p:nvPr/>
         </p:nvSpPr>
@@ -5408,9 +5746,72 @@
           <a:chExt cx="0" cy="0"/>
         </a:xfrm>
       </p:grpSpPr>
-      <p:sp>
-        <p:nvSpPr>
-          <p:cNvPr id="2" name="Text 0"/>
+      <p:pic>
+        <p:nvPicPr>
+          <p:cNvPr id="2" name="Image 0" descr="/sessions/compassionate-sweet-heisenberg/mnt/dev-aspath-life-main/tools/assets/logo-deck.png">    </p:cNvPr>
+          <p:cNvPicPr>
+            <a:picLocks noChangeAspect="1"/>
+          </p:cNvPicPr>
+          <p:nvPr/>
+        </p:nvPicPr>
+        <p:blipFill>
+          <a:blip r:embed="rId1"/>
+          <a:stretch>
+            <a:fillRect/>
+          </a:stretch>
+        </p:blipFill>
+        <p:spPr>
+          <a:xfrm>
+            <a:off x="11458173" y="109728"/>
+            <a:ext cx="209571" cy="256032"/>
+          </a:xfrm>
+          <a:prstGeom prst="rect">
+            <a:avLst/>
+          </a:prstGeom>
+        </p:spPr>
+      </p:pic>
+      <p:sp>
+        <p:nvSpPr>
+          <p:cNvPr id="3" name="Text 0"/>
+          <p:cNvSpPr txBox="1"/>
+          <p:nvPr/>
+        </p:nvSpPr>
+        <p:spPr>
+          <a:xfrm>
+            <a:off x="8623533" y="128016"/>
+            <a:ext cx="2743200" cy="237744"/>
+          </a:xfrm>
+          <a:prstGeom prst="rect">
+            <a:avLst/>
+          </a:prstGeom>
+          <a:noFill/>
+          <a:ln/>
+        </p:spPr>
+        <p:txBody>
+          <a:bodyPr wrap="square" lIns="0" tIns="0" rIns="0" bIns="0" rtlCol="0" anchor="ctr"/>
+          <a:lstStyle/>
+          <a:p>
+            <a:pPr algn="r" indent="0" marL="0">
+              <a:buNone/>
+            </a:pPr>
+            <a:r>
+              <a:rPr lang="en-US" sz="750" dirty="0">
+                <a:solidFill>
+                  <a:srgbClr val="97A9AF"/>
+                </a:solidFill>
+                <a:latin typeface="Meiryo" pitchFamily="34" charset="0"/>
+                <a:ea typeface="Meiryo" pitchFamily="34" charset="-122"/>
+                <a:cs typeface="Meiryo" pitchFamily="34" charset="-120"/>
+              </a:rPr>
+              <a:t>鹿児島のパーキンソン病専門トレーニングスタジオ</a:t>
+            </a:r>
+            <a:endParaRPr lang="en-US" sz="750" dirty="0"/>
+          </a:p>
+        </p:txBody>
+      </p:sp>
+      <p:sp>
+        <p:nvSpPr>
+          <p:cNvPr id="4" name="Text 1"/>
           <p:cNvSpPr txBox="1"/>
           <p:nvPr/>
         </p:nvSpPr>
@@ -5449,7 +5850,7 @@
       </p:sp>
       <p:sp>
         <p:nvSpPr>
-          <p:cNvPr id="3" name="Text 1"/>
+          <p:cNvPr id="5" name="Text 2"/>
           <p:cNvSpPr txBox="1"/>
           <p:nvPr/>
         </p:nvSpPr>
@@ -5488,7 +5889,7 @@
       </p:sp>
       <p:sp>
         <p:nvSpPr>
-          <p:cNvPr id="4" name="Text 2"/>
+          <p:cNvPr id="6" name="Text 3"/>
           <p:cNvSpPr txBox="1"/>
           <p:nvPr/>
         </p:nvSpPr>
@@ -5527,7 +5928,7 @@
       </p:sp>
       <p:sp>
         <p:nvSpPr>
-          <p:cNvPr id="5" name="Shape 3"/>
+          <p:cNvPr id="7" name="Shape 4"/>
           <p:cNvSpPr/>
           <p:nvPr/>
         </p:nvSpPr>
@@ -5554,7 +5955,7 @@
       </p:sp>
       <p:sp>
         <p:nvSpPr>
-          <p:cNvPr id="6" name="Shape 4"/>
+          <p:cNvPr id="8" name="Shape 5"/>
           <p:cNvSpPr/>
           <p:nvPr/>
         </p:nvSpPr>
@@ -5574,7 +5975,7 @@
       </p:sp>
       <p:sp>
         <p:nvSpPr>
-          <p:cNvPr id="7" name="Text 5"/>
+          <p:cNvPr id="9" name="Text 6"/>
           <p:cNvSpPr txBox="1"/>
           <p:nvPr/>
         </p:nvSpPr>
@@ -5613,7 +6014,7 @@
       </p:sp>
       <p:sp>
         <p:nvSpPr>
-          <p:cNvPr id="8" name="Text 6"/>
+          <p:cNvPr id="10" name="Text 7"/>
           <p:cNvSpPr txBox="1"/>
           <p:nvPr/>
         </p:nvSpPr>
@@ -5652,7 +6053,7 @@
       </p:sp>
       <p:sp>
         <p:nvSpPr>
-          <p:cNvPr id="9" name="Text 7"/>
+          <p:cNvPr id="11" name="Text 8"/>
           <p:cNvSpPr txBox="1"/>
           <p:nvPr/>
         </p:nvSpPr>
@@ -5694,7 +6095,7 @@
       </p:sp>
       <p:sp>
         <p:nvSpPr>
-          <p:cNvPr id="10" name="Shape 8"/>
+          <p:cNvPr id="12" name="Shape 9"/>
           <p:cNvSpPr/>
           <p:nvPr/>
         </p:nvSpPr>
@@ -5721,7 +6122,7 @@
       </p:sp>
       <p:sp>
         <p:nvSpPr>
-          <p:cNvPr id="11" name="Shape 9"/>
+          <p:cNvPr id="13" name="Shape 10"/>
           <p:cNvSpPr/>
           <p:nvPr/>
         </p:nvSpPr>
@@ -5741,7 +6142,7 @@
       </p:sp>
       <p:sp>
         <p:nvSpPr>
-          <p:cNvPr id="12" name="Text 10"/>
+          <p:cNvPr id="14" name="Text 11"/>
           <p:cNvSpPr txBox="1"/>
           <p:nvPr/>
         </p:nvSpPr>
@@ -5780,7 +6181,7 @@
       </p:sp>
       <p:sp>
         <p:nvSpPr>
-          <p:cNvPr id="13" name="Text 11"/>
+          <p:cNvPr id="15" name="Text 12"/>
           <p:cNvSpPr txBox="1"/>
           <p:nvPr/>
         </p:nvSpPr>
@@ -5819,7 +6220,7 @@
       </p:sp>
       <p:sp>
         <p:nvSpPr>
-          <p:cNvPr id="14" name="Text 12"/>
+          <p:cNvPr id="16" name="Text 13"/>
           <p:cNvSpPr txBox="1"/>
           <p:nvPr/>
         </p:nvSpPr>
@@ -5861,7 +6262,7 @@
       </p:sp>
       <p:sp>
         <p:nvSpPr>
-          <p:cNvPr id="15" name="Shape 13"/>
+          <p:cNvPr id="17" name="Shape 14"/>
           <p:cNvSpPr/>
           <p:nvPr/>
         </p:nvSpPr>
@@ -5888,7 +6289,7 @@
       </p:sp>
       <p:sp>
         <p:nvSpPr>
-          <p:cNvPr id="16" name="Shape 14"/>
+          <p:cNvPr id="18" name="Shape 15"/>
           <p:cNvSpPr/>
           <p:nvPr/>
         </p:nvSpPr>
@@ -5908,7 +6309,7 @@
       </p:sp>
       <p:sp>
         <p:nvSpPr>
-          <p:cNvPr id="17" name="Text 15"/>
+          <p:cNvPr id="19" name="Text 16"/>
           <p:cNvSpPr txBox="1"/>
           <p:nvPr/>
         </p:nvSpPr>
@@ -5947,7 +6348,7 @@
       </p:sp>
       <p:sp>
         <p:nvSpPr>
-          <p:cNvPr id="18" name="Text 16"/>
+          <p:cNvPr id="20" name="Text 17"/>
           <p:cNvSpPr txBox="1"/>
           <p:nvPr/>
         </p:nvSpPr>
@@ -5986,7 +6387,7 @@
       </p:sp>
       <p:sp>
         <p:nvSpPr>
-          <p:cNvPr id="19" name="Text 17"/>
+          <p:cNvPr id="21" name="Text 18"/>
           <p:cNvSpPr txBox="1"/>
           <p:nvPr/>
         </p:nvSpPr>
@@ -6028,7 +6429,7 @@
       </p:sp>
       <p:sp>
         <p:nvSpPr>
-          <p:cNvPr id="20" name="Shape 18"/>
+          <p:cNvPr id="22" name="Shape 19"/>
           <p:cNvSpPr/>
           <p:nvPr/>
         </p:nvSpPr>
@@ -6055,7 +6456,7 @@
       </p:sp>
       <p:sp>
         <p:nvSpPr>
-          <p:cNvPr id="21" name="Shape 19"/>
+          <p:cNvPr id="23" name="Shape 20"/>
           <p:cNvSpPr/>
           <p:nvPr/>
         </p:nvSpPr>
@@ -6075,7 +6476,7 @@
       </p:sp>
       <p:sp>
         <p:nvSpPr>
-          <p:cNvPr id="22" name="Text 20"/>
+          <p:cNvPr id="24" name="Text 21"/>
           <p:cNvSpPr txBox="1"/>
           <p:nvPr/>
         </p:nvSpPr>
@@ -6114,7 +6515,7 @@
       </p:sp>
       <p:sp>
         <p:nvSpPr>
-          <p:cNvPr id="23" name="Text 21"/>
+          <p:cNvPr id="25" name="Text 22"/>
           <p:cNvSpPr txBox="1"/>
           <p:nvPr/>
         </p:nvSpPr>
@@ -6893,9 +7294,72 @@
           <a:chExt cx="0" cy="0"/>
         </a:xfrm>
       </p:grpSpPr>
-      <p:sp>
-        <p:nvSpPr>
-          <p:cNvPr id="2" name="Text 0"/>
+      <p:pic>
+        <p:nvPicPr>
+          <p:cNvPr id="2" name="Image 0" descr="/sessions/compassionate-sweet-heisenberg/mnt/dev-aspath-life-main/tools/assets/logo-deck.png">    </p:cNvPr>
+          <p:cNvPicPr>
+            <a:picLocks noChangeAspect="1"/>
+          </p:cNvPicPr>
+          <p:nvPr/>
+        </p:nvPicPr>
+        <p:blipFill>
+          <a:blip r:embed="rId1"/>
+          <a:stretch>
+            <a:fillRect/>
+          </a:stretch>
+        </p:blipFill>
+        <p:spPr>
+          <a:xfrm>
+            <a:off x="11458173" y="109728"/>
+            <a:ext cx="209571" cy="256032"/>
+          </a:xfrm>
+          <a:prstGeom prst="rect">
+            <a:avLst/>
+          </a:prstGeom>
+        </p:spPr>
+      </p:pic>
+      <p:sp>
+        <p:nvSpPr>
+          <p:cNvPr id="3" name="Text 0"/>
+          <p:cNvSpPr txBox="1"/>
+          <p:nvPr/>
+        </p:nvSpPr>
+        <p:spPr>
+          <a:xfrm>
+            <a:off x="8623533" y="128016"/>
+            <a:ext cx="2743200" cy="237744"/>
+          </a:xfrm>
+          <a:prstGeom prst="rect">
+            <a:avLst/>
+          </a:prstGeom>
+          <a:noFill/>
+          <a:ln/>
+        </p:spPr>
+        <p:txBody>
+          <a:bodyPr wrap="square" lIns="0" tIns="0" rIns="0" bIns="0" rtlCol="0" anchor="ctr"/>
+          <a:lstStyle/>
+          <a:p>
+            <a:pPr algn="r" indent="0" marL="0">
+              <a:buNone/>
+            </a:pPr>
+            <a:r>
+              <a:rPr lang="en-US" sz="750" dirty="0">
+                <a:solidFill>
+                  <a:srgbClr val="97A9AF"/>
+                </a:solidFill>
+                <a:latin typeface="Meiryo" pitchFamily="34" charset="0"/>
+                <a:ea typeface="Meiryo" pitchFamily="34" charset="-122"/>
+                <a:cs typeface="Meiryo" pitchFamily="34" charset="-120"/>
+              </a:rPr>
+              <a:t>鹿児島のパーキンソン病専門トレーニングスタジオ</a:t>
+            </a:r>
+            <a:endParaRPr lang="en-US" sz="750" dirty="0"/>
+          </a:p>
+        </p:txBody>
+      </p:sp>
+      <p:sp>
+        <p:nvSpPr>
+          <p:cNvPr id="4" name="Text 1"/>
           <p:cNvSpPr txBox="1"/>
           <p:nvPr/>
         </p:nvSpPr>
@@ -6934,7 +7398,7 @@
       </p:sp>
       <p:sp>
         <p:nvSpPr>
-          <p:cNvPr id="3" name="Text 1"/>
+          <p:cNvPr id="5" name="Text 2"/>
           <p:cNvSpPr txBox="1"/>
           <p:nvPr/>
         </p:nvSpPr>
@@ -6973,7 +7437,7 @@
       </p:sp>
       <p:sp>
         <p:nvSpPr>
-          <p:cNvPr id="4" name="Text 2"/>
+          <p:cNvPr id="6" name="Text 3"/>
           <p:cNvSpPr txBox="1"/>
           <p:nvPr/>
         </p:nvSpPr>
@@ -7012,7 +7476,7 @@
       </p:sp>
       <p:sp>
         <p:nvSpPr>
-          <p:cNvPr id="5" name="Shape 3"/>
+          <p:cNvPr id="7" name="Shape 4"/>
           <p:cNvSpPr/>
           <p:nvPr/>
         </p:nvSpPr>
@@ -7039,7 +7503,7 @@
       </p:sp>
       <p:sp>
         <p:nvSpPr>
-          <p:cNvPr id="6" name="Shape 4"/>
+          <p:cNvPr id="8" name="Shape 5"/>
           <p:cNvSpPr/>
           <p:nvPr/>
         </p:nvSpPr>
@@ -7059,7 +7523,7 @@
       </p:sp>
       <p:sp>
         <p:nvSpPr>
-          <p:cNvPr id="7" name="Text 5"/>
+          <p:cNvPr id="9" name="Text 6"/>
           <p:cNvSpPr txBox="1"/>
           <p:nvPr/>
         </p:nvSpPr>
@@ -7098,7 +7562,7 @@
       </p:sp>
       <p:sp>
         <p:nvSpPr>
-          <p:cNvPr id="8" name="Text 6"/>
+          <p:cNvPr id="10" name="Text 7"/>
           <p:cNvSpPr txBox="1"/>
           <p:nvPr/>
         </p:nvSpPr>
@@ -7137,7 +7601,7 @@
       </p:sp>
       <p:sp>
         <p:nvSpPr>
-          <p:cNvPr id="9" name="Text 7"/>
+          <p:cNvPr id="11" name="Text 8"/>
           <p:cNvSpPr txBox="1"/>
           <p:nvPr/>
         </p:nvSpPr>
@@ -7176,7 +7640,7 @@
       </p:sp>
       <p:sp>
         <p:nvSpPr>
-          <p:cNvPr id="10" name="Shape 8"/>
+          <p:cNvPr id="12" name="Shape 9"/>
           <p:cNvSpPr/>
           <p:nvPr/>
         </p:nvSpPr>
@@ -7203,7 +7667,7 @@
       </p:sp>
       <p:sp>
         <p:nvSpPr>
-          <p:cNvPr id="11" name="Shape 9"/>
+          <p:cNvPr id="13" name="Shape 10"/>
           <p:cNvSpPr/>
           <p:nvPr/>
         </p:nvSpPr>
@@ -7223,7 +7687,7 @@
       </p:sp>
       <p:sp>
         <p:nvSpPr>
-          <p:cNvPr id="12" name="Text 10"/>
+          <p:cNvPr id="14" name="Text 11"/>
           <p:cNvSpPr txBox="1"/>
           <p:nvPr/>
         </p:nvSpPr>
@@ -7262,7 +7726,7 @@
       </p:sp>
       <p:sp>
         <p:nvSpPr>
-          <p:cNvPr id="13" name="Text 11"/>
+          <p:cNvPr id="15" name="Text 12"/>
           <p:cNvSpPr txBox="1"/>
           <p:nvPr/>
         </p:nvSpPr>
@@ -7301,7 +7765,7 @@
       </p:sp>
       <p:sp>
         <p:nvSpPr>
-          <p:cNvPr id="14" name="Text 12"/>
+          <p:cNvPr id="16" name="Text 13"/>
           <p:cNvSpPr txBox="1"/>
           <p:nvPr/>
         </p:nvSpPr>
@@ -7340,7 +7804,7 @@
       </p:sp>
       <p:sp>
         <p:nvSpPr>
-          <p:cNvPr id="15" name="Shape 13"/>
+          <p:cNvPr id="17" name="Shape 14"/>
           <p:cNvSpPr/>
           <p:nvPr/>
         </p:nvSpPr>
@@ -7367,7 +7831,7 @@
       </p:sp>
       <p:sp>
         <p:nvSpPr>
-          <p:cNvPr id="16" name="Shape 14"/>
+          <p:cNvPr id="18" name="Shape 15"/>
           <p:cNvSpPr/>
           <p:nvPr/>
         </p:nvSpPr>
@@ -7387,7 +7851,7 @@
       </p:sp>
       <p:sp>
         <p:nvSpPr>
-          <p:cNvPr id="17" name="Text 15"/>
+          <p:cNvPr id="19" name="Text 16"/>
           <p:cNvSpPr txBox="1"/>
           <p:nvPr/>
         </p:nvSpPr>
@@ -7426,7 +7890,7 @@
       </p:sp>
       <p:sp>
         <p:nvSpPr>
-          <p:cNvPr id="18" name="Text 16"/>
+          <p:cNvPr id="20" name="Text 17"/>
           <p:cNvSpPr txBox="1"/>
           <p:nvPr/>
         </p:nvSpPr>
@@ -7465,7 +7929,7 @@
       </p:sp>
       <p:sp>
         <p:nvSpPr>
-          <p:cNvPr id="19" name="Text 17"/>
+          <p:cNvPr id="21" name="Text 18"/>
           <p:cNvSpPr txBox="1"/>
           <p:nvPr/>
         </p:nvSpPr>
@@ -7504,7 +7968,7 @@
       </p:sp>
       <p:sp>
         <p:nvSpPr>
-          <p:cNvPr id="20" name="Shape 18"/>
+          <p:cNvPr id="22" name="Shape 19"/>
           <p:cNvSpPr/>
           <p:nvPr/>
         </p:nvSpPr>
@@ -7531,7 +7995,7 @@
       </p:sp>
       <p:sp>
         <p:nvSpPr>
-          <p:cNvPr id="21" name="Shape 19"/>
+          <p:cNvPr id="23" name="Shape 20"/>
           <p:cNvSpPr/>
           <p:nvPr/>
         </p:nvSpPr>
@@ -7551,7 +8015,7 @@
       </p:sp>
       <p:sp>
         <p:nvSpPr>
-          <p:cNvPr id="22" name="Text 20"/>
+          <p:cNvPr id="24" name="Text 21"/>
           <p:cNvSpPr txBox="1"/>
           <p:nvPr/>
         </p:nvSpPr>
@@ -7590,7 +8054,7 @@
       </p:sp>
       <p:sp>
         <p:nvSpPr>
-          <p:cNvPr id="23" name="Text 21"/>
+          <p:cNvPr id="25" name="Text 22"/>
           <p:cNvSpPr txBox="1"/>
           <p:nvPr/>
         </p:nvSpPr>
@@ -7629,7 +8093,7 @@
       </p:sp>
       <p:sp>
         <p:nvSpPr>
-          <p:cNvPr id="24" name="Text 22"/>
+          <p:cNvPr id="26" name="Text 23"/>
           <p:cNvSpPr txBox="1"/>
           <p:nvPr/>
         </p:nvSpPr>
@@ -7668,7 +8132,7 @@
       </p:sp>
       <p:sp>
         <p:nvSpPr>
-          <p:cNvPr id="25" name="Shape 23"/>
+          <p:cNvPr id="27" name="Shape 24"/>
           <p:cNvSpPr/>
           <p:nvPr/>
         </p:nvSpPr>
@@ -7695,7 +8159,7 @@
       </p:sp>
       <p:sp>
         <p:nvSpPr>
-          <p:cNvPr id="26" name="Shape 24"/>
+          <p:cNvPr id="28" name="Shape 25"/>
           <p:cNvSpPr/>
           <p:nvPr/>
         </p:nvSpPr>
@@ -7715,7 +8179,7 @@
       </p:sp>
       <p:sp>
         <p:nvSpPr>
-          <p:cNvPr id="27" name="Text 25"/>
+          <p:cNvPr id="29" name="Text 26"/>
           <p:cNvSpPr txBox="1"/>
           <p:nvPr/>
         </p:nvSpPr>
@@ -7754,7 +8218,7 @@
       </p:sp>
       <p:sp>
         <p:nvSpPr>
-          <p:cNvPr id="28" name="Text 26"/>
+          <p:cNvPr id="30" name="Text 27"/>
           <p:cNvSpPr txBox="1"/>
           <p:nvPr/>
         </p:nvSpPr>
@@ -7793,7 +8257,7 @@
       </p:sp>
       <p:sp>
         <p:nvSpPr>
-          <p:cNvPr id="29" name="Text 27"/>
+          <p:cNvPr id="31" name="Text 28"/>
           <p:cNvSpPr txBox="1"/>
           <p:nvPr/>
         </p:nvSpPr>
@@ -7832,7 +8296,7 @@
       </p:sp>
       <p:sp>
         <p:nvSpPr>
-          <p:cNvPr id="30" name="Shape 28"/>
+          <p:cNvPr id="32" name="Shape 29"/>
           <p:cNvSpPr/>
           <p:nvPr/>
         </p:nvSpPr>
@@ -7859,7 +8323,7 @@
       </p:sp>
       <p:sp>
         <p:nvSpPr>
-          <p:cNvPr id="31" name="Shape 29"/>
+          <p:cNvPr id="33" name="Shape 30"/>
           <p:cNvSpPr/>
           <p:nvPr/>
         </p:nvSpPr>
@@ -7879,7 +8343,7 @@
       </p:sp>
       <p:sp>
         <p:nvSpPr>
-          <p:cNvPr id="32" name="Text 30"/>
+          <p:cNvPr id="34" name="Text 31"/>
           <p:cNvSpPr txBox="1"/>
           <p:nvPr/>
         </p:nvSpPr>
@@ -7918,7 +8382,7 @@
       </p:sp>
       <p:sp>
         <p:nvSpPr>
-          <p:cNvPr id="33" name="Text 31"/>
+          <p:cNvPr id="35" name="Text 32"/>
           <p:cNvSpPr txBox="1"/>
           <p:nvPr/>
         </p:nvSpPr>
@@ -7957,7 +8421,7 @@
       </p:sp>
       <p:sp>
         <p:nvSpPr>
-          <p:cNvPr id="34" name="Text 32"/>
+          <p:cNvPr id="36" name="Text 33"/>
           <p:cNvSpPr txBox="1"/>
           <p:nvPr/>
         </p:nvSpPr>
@@ -7996,7 +8460,7 @@
       </p:sp>
       <p:sp>
         <p:nvSpPr>
-          <p:cNvPr id="35" name="Shape 33"/>
+          <p:cNvPr id="37" name="Shape 34"/>
           <p:cNvSpPr/>
           <p:nvPr/>
         </p:nvSpPr>
@@ -8023,7 +8487,7 @@
       </p:sp>
       <p:sp>
         <p:nvSpPr>
-          <p:cNvPr id="36" name="Shape 34"/>
+          <p:cNvPr id="38" name="Shape 35"/>
           <p:cNvSpPr/>
           <p:nvPr/>
         </p:nvSpPr>
@@ -8043,7 +8507,7 @@
       </p:sp>
       <p:sp>
         <p:nvSpPr>
-          <p:cNvPr id="37" name="Text 35"/>
+          <p:cNvPr id="39" name="Text 36"/>
           <p:cNvSpPr txBox="1"/>
           <p:nvPr/>
         </p:nvSpPr>
@@ -8082,7 +8546,7 @@
       </p:sp>
       <p:sp>
         <p:nvSpPr>
-          <p:cNvPr id="38" name="Text 36"/>
+          <p:cNvPr id="40" name="Text 37"/>
           <p:cNvSpPr txBox="1"/>
           <p:nvPr/>
         </p:nvSpPr>
@@ -8121,7 +8585,7 @@
       </p:sp>
       <p:sp>
         <p:nvSpPr>
-          <p:cNvPr id="39" name="Text 37"/>
+          <p:cNvPr id="41" name="Text 38"/>
           <p:cNvSpPr txBox="1"/>
           <p:nvPr/>
         </p:nvSpPr>
@@ -8160,7 +8624,7 @@
       </p:sp>
       <p:sp>
         <p:nvSpPr>
-          <p:cNvPr id="40" name="Shape 38"/>
+          <p:cNvPr id="42" name="Shape 39"/>
           <p:cNvSpPr/>
           <p:nvPr/>
         </p:nvSpPr>
@@ -8187,7 +8651,7 @@
       </p:sp>
       <p:sp>
         <p:nvSpPr>
-          <p:cNvPr id="41" name="Shape 39"/>
+          <p:cNvPr id="43" name="Shape 40"/>
           <p:cNvSpPr/>
           <p:nvPr/>
         </p:nvSpPr>
@@ -8207,7 +8671,7 @@
       </p:sp>
       <p:sp>
         <p:nvSpPr>
-          <p:cNvPr id="42" name="Text 40"/>
+          <p:cNvPr id="44" name="Text 41"/>
           <p:cNvSpPr txBox="1"/>
           <p:nvPr/>
         </p:nvSpPr>
@@ -8246,7 +8710,7 @@
       </p:sp>
       <p:sp>
         <p:nvSpPr>
-          <p:cNvPr id="43" name="Text 41"/>
+          <p:cNvPr id="45" name="Text 42"/>
           <p:cNvSpPr txBox="1"/>
           <p:nvPr/>
         </p:nvSpPr>
@@ -8338,9 +8802,72 @@
           <a:chExt cx="0" cy="0"/>
         </a:xfrm>
       </p:grpSpPr>
-      <p:sp>
-        <p:nvSpPr>
-          <p:cNvPr id="2" name="Text 0"/>
+      <p:pic>
+        <p:nvPicPr>
+          <p:cNvPr id="2" name="Image 0" descr="/sessions/compassionate-sweet-heisenberg/mnt/dev-aspath-life-main/tools/assets/logo-deck.png">    </p:cNvPr>
+          <p:cNvPicPr>
+            <a:picLocks noChangeAspect="1"/>
+          </p:cNvPicPr>
+          <p:nvPr/>
+        </p:nvPicPr>
+        <p:blipFill>
+          <a:blip r:embed="rId1"/>
+          <a:stretch>
+            <a:fillRect/>
+          </a:stretch>
+        </p:blipFill>
+        <p:spPr>
+          <a:xfrm>
+            <a:off x="11458173" y="109728"/>
+            <a:ext cx="209571" cy="256032"/>
+          </a:xfrm>
+          <a:prstGeom prst="rect">
+            <a:avLst/>
+          </a:prstGeom>
+        </p:spPr>
+      </p:pic>
+      <p:sp>
+        <p:nvSpPr>
+          <p:cNvPr id="3" name="Text 0"/>
+          <p:cNvSpPr txBox="1"/>
+          <p:nvPr/>
+        </p:nvSpPr>
+        <p:spPr>
+          <a:xfrm>
+            <a:off x="8623533" y="128016"/>
+            <a:ext cx="2743200" cy="237744"/>
+          </a:xfrm>
+          <a:prstGeom prst="rect">
+            <a:avLst/>
+          </a:prstGeom>
+          <a:noFill/>
+          <a:ln/>
+        </p:spPr>
+        <p:txBody>
+          <a:bodyPr wrap="square" lIns="0" tIns="0" rIns="0" bIns="0" rtlCol="0" anchor="ctr"/>
+          <a:lstStyle/>
+          <a:p>
+            <a:pPr algn="r" indent="0" marL="0">
+              <a:buNone/>
+            </a:pPr>
+            <a:r>
+              <a:rPr lang="en-US" sz="750" dirty="0">
+                <a:solidFill>
+                  <a:srgbClr val="97A9AF"/>
+                </a:solidFill>
+                <a:latin typeface="Meiryo" pitchFamily="34" charset="0"/>
+                <a:ea typeface="Meiryo" pitchFamily="34" charset="-122"/>
+                <a:cs typeface="Meiryo" pitchFamily="34" charset="-120"/>
+              </a:rPr>
+              <a:t>鹿児島のパーキンソン病専門トレーニングスタジオ</a:t>
+            </a:r>
+            <a:endParaRPr lang="en-US" sz="750" dirty="0"/>
+          </a:p>
+        </p:txBody>
+      </p:sp>
+      <p:sp>
+        <p:nvSpPr>
+          <p:cNvPr id="4" name="Text 1"/>
           <p:cNvSpPr txBox="1"/>
           <p:nvPr/>
         </p:nvSpPr>
@@ -8379,7 +8906,7 @@
       </p:sp>
       <p:sp>
         <p:nvSpPr>
-          <p:cNvPr id="3" name="Text 1"/>
+          <p:cNvPr id="5" name="Text 2"/>
           <p:cNvSpPr txBox="1"/>
           <p:nvPr/>
         </p:nvSpPr>
@@ -8418,7 +8945,7 @@
       </p:sp>
       <p:sp>
         <p:nvSpPr>
-          <p:cNvPr id="4" name="Text 2"/>
+          <p:cNvPr id="6" name="Text 3"/>
           <p:cNvSpPr txBox="1"/>
           <p:nvPr/>
         </p:nvSpPr>
@@ -8457,7 +8984,7 @@
       </p:sp>
       <p:sp>
         <p:nvSpPr>
-          <p:cNvPr id="5" name="Shape 3"/>
+          <p:cNvPr id="7" name="Shape 4"/>
           <p:cNvSpPr/>
           <p:nvPr/>
         </p:nvSpPr>
@@ -8484,7 +9011,7 @@
       </p:sp>
       <p:sp>
         <p:nvSpPr>
-          <p:cNvPr id="6" name="Text 4"/>
+          <p:cNvPr id="8" name="Text 5"/>
           <p:cNvSpPr txBox="1"/>
           <p:nvPr/>
         </p:nvSpPr>
@@ -8523,7 +9050,7 @@
       </p:sp>
       <p:sp>
         <p:nvSpPr>
-          <p:cNvPr id="7" name="Text 5"/>
+          <p:cNvPr id="9" name="Text 6"/>
           <p:cNvSpPr txBox="1"/>
           <p:nvPr/>
         </p:nvSpPr>
@@ -8713,7 +9240,7 @@
       </p:sp>
       <p:sp>
         <p:nvSpPr>
-          <p:cNvPr id="8" name="Shape 6"/>
+          <p:cNvPr id="10" name="Shape 7"/>
           <p:cNvSpPr/>
           <p:nvPr/>
         </p:nvSpPr>
@@ -8740,7 +9267,7 @@
       </p:sp>
       <p:sp>
         <p:nvSpPr>
-          <p:cNvPr id="9" name="Text 7"/>
+          <p:cNvPr id="11" name="Text 8"/>
           <p:cNvSpPr txBox="1"/>
           <p:nvPr/>
         </p:nvSpPr>
@@ -8779,7 +9306,7 @@
       </p:sp>
       <p:sp>
         <p:nvSpPr>
-          <p:cNvPr id="10" name="Text 8"/>
+          <p:cNvPr id="12" name="Text 9"/>
           <p:cNvSpPr txBox="1"/>
           <p:nvPr/>
         </p:nvSpPr>
@@ -8927,7 +9454,7 @@
       </p:sp>
       <p:sp>
         <p:nvSpPr>
-          <p:cNvPr id="11" name="Shape 9"/>
+          <p:cNvPr id="13" name="Shape 10"/>
           <p:cNvSpPr/>
           <p:nvPr/>
         </p:nvSpPr>
@@ -8954,7 +9481,7 @@
       </p:sp>
       <p:sp>
         <p:nvSpPr>
-          <p:cNvPr id="12" name="Shape 10"/>
+          <p:cNvPr id="14" name="Shape 11"/>
           <p:cNvSpPr/>
           <p:nvPr/>
         </p:nvSpPr>
@@ -8974,7 +9501,7 @@
       </p:sp>
       <p:sp>
         <p:nvSpPr>
-          <p:cNvPr id="13" name="Text 11"/>
+          <p:cNvPr id="15" name="Text 12"/>
           <p:cNvSpPr txBox="1"/>
           <p:nvPr/>
         </p:nvSpPr>
@@ -9013,7 +9540,7 @@
       </p:sp>
       <p:sp>
         <p:nvSpPr>
-          <p:cNvPr id="14" name="Text 12"/>
+          <p:cNvPr id="16" name="Text 13"/>
           <p:cNvSpPr txBox="1"/>
           <p:nvPr/>
         </p:nvSpPr>
@@ -9105,9 +9632,72 @@
           <a:chExt cx="0" cy="0"/>
         </a:xfrm>
       </p:grpSpPr>
-      <p:sp>
-        <p:nvSpPr>
-          <p:cNvPr id="2" name="Text 0"/>
+      <p:pic>
+        <p:nvPicPr>
+          <p:cNvPr id="2" name="Image 0" descr="/sessions/compassionate-sweet-heisenberg/mnt/dev-aspath-life-main/tools/assets/logo-deck.png">    </p:cNvPr>
+          <p:cNvPicPr>
+            <a:picLocks noChangeAspect="1"/>
+          </p:cNvPicPr>
+          <p:nvPr/>
+        </p:nvPicPr>
+        <p:blipFill>
+          <a:blip r:embed="rId1"/>
+          <a:stretch>
+            <a:fillRect/>
+          </a:stretch>
+        </p:blipFill>
+        <p:spPr>
+          <a:xfrm>
+            <a:off x="11458173" y="109728"/>
+            <a:ext cx="209571" cy="256032"/>
+          </a:xfrm>
+          <a:prstGeom prst="rect">
+            <a:avLst/>
+          </a:prstGeom>
+        </p:spPr>
+      </p:pic>
+      <p:sp>
+        <p:nvSpPr>
+          <p:cNvPr id="3" name="Text 0"/>
+          <p:cNvSpPr txBox="1"/>
+          <p:nvPr/>
+        </p:nvSpPr>
+        <p:spPr>
+          <a:xfrm>
+            <a:off x="8623533" y="128016"/>
+            <a:ext cx="2743200" cy="237744"/>
+          </a:xfrm>
+          <a:prstGeom prst="rect">
+            <a:avLst/>
+          </a:prstGeom>
+          <a:noFill/>
+          <a:ln/>
+        </p:spPr>
+        <p:txBody>
+          <a:bodyPr wrap="square" lIns="0" tIns="0" rIns="0" bIns="0" rtlCol="0" anchor="ctr"/>
+          <a:lstStyle/>
+          <a:p>
+            <a:pPr algn="r" indent="0" marL="0">
+              <a:buNone/>
+            </a:pPr>
+            <a:r>
+              <a:rPr lang="en-US" sz="750" dirty="0">
+                <a:solidFill>
+                  <a:srgbClr val="97A9AF"/>
+                </a:solidFill>
+                <a:latin typeface="Meiryo" pitchFamily="34" charset="0"/>
+                <a:ea typeface="Meiryo" pitchFamily="34" charset="-122"/>
+                <a:cs typeface="Meiryo" pitchFamily="34" charset="-120"/>
+              </a:rPr>
+              <a:t>鹿児島のパーキンソン病専門トレーニングスタジオ</a:t>
+            </a:r>
+            <a:endParaRPr lang="en-US" sz="750" dirty="0"/>
+          </a:p>
+        </p:txBody>
+      </p:sp>
+      <p:sp>
+        <p:nvSpPr>
+          <p:cNvPr id="4" name="Text 1"/>
           <p:cNvSpPr txBox="1"/>
           <p:nvPr/>
         </p:nvSpPr>
@@ -9146,7 +9736,7 @@
       </p:sp>
       <p:sp>
         <p:nvSpPr>
-          <p:cNvPr id="3" name="Text 1"/>
+          <p:cNvPr id="5" name="Text 2"/>
           <p:cNvSpPr txBox="1"/>
           <p:nvPr/>
         </p:nvSpPr>
@@ -9185,7 +9775,7 @@
       </p:sp>
       <p:sp>
         <p:nvSpPr>
-          <p:cNvPr id="4" name="Text 2"/>
+          <p:cNvPr id="6" name="Text 3"/>
           <p:cNvSpPr txBox="1"/>
           <p:nvPr/>
         </p:nvSpPr>
@@ -9224,7 +9814,7 @@
       </p:sp>
       <p:sp>
         <p:nvSpPr>
-          <p:cNvPr id="5" name="Shape 3"/>
+          <p:cNvPr id="7" name="Shape 4"/>
           <p:cNvSpPr/>
           <p:nvPr/>
         </p:nvSpPr>
@@ -9251,7 +9841,7 @@
       </p:sp>
       <p:sp>
         <p:nvSpPr>
-          <p:cNvPr id="6" name="Text 4"/>
+          <p:cNvPr id="8" name="Text 5"/>
           <p:cNvSpPr txBox="1"/>
           <p:nvPr/>
         </p:nvSpPr>
@@ -9290,7 +9880,7 @@
       </p:sp>
       <p:sp>
         <p:nvSpPr>
-          <p:cNvPr id="7" name="Text 5"/>
+          <p:cNvPr id="9" name="Text 6"/>
           <p:cNvSpPr txBox="1"/>
           <p:nvPr/>
         </p:nvSpPr>
@@ -9329,7 +9919,7 @@
       </p:sp>
       <p:sp>
         <p:nvSpPr>
-          <p:cNvPr id="8" name="Text 6"/>
+          <p:cNvPr id="10" name="Text 7"/>
           <p:cNvSpPr txBox="1"/>
           <p:nvPr/>
         </p:nvSpPr>
@@ -9371,7 +9961,7 @@
       </p:sp>
       <p:sp>
         <p:nvSpPr>
-          <p:cNvPr id="9" name="Shape 7"/>
+          <p:cNvPr id="11" name="Shape 8"/>
           <p:cNvSpPr/>
           <p:nvPr/>
         </p:nvSpPr>
@@ -9398,7 +9988,7 @@
       </p:sp>
       <p:sp>
         <p:nvSpPr>
-          <p:cNvPr id="10" name="Text 8"/>
+          <p:cNvPr id="12" name="Text 9"/>
           <p:cNvSpPr txBox="1"/>
           <p:nvPr/>
         </p:nvSpPr>
@@ -9437,7 +10027,7 @@
       </p:sp>
       <p:sp>
         <p:nvSpPr>
-          <p:cNvPr id="11" name="Text 9"/>
+          <p:cNvPr id="13" name="Text 10"/>
           <p:cNvSpPr txBox="1"/>
           <p:nvPr/>
         </p:nvSpPr>
@@ -9476,7 +10066,7 @@
       </p:sp>
       <p:sp>
         <p:nvSpPr>
-          <p:cNvPr id="12" name="Text 10"/>
+          <p:cNvPr id="14" name="Text 11"/>
           <p:cNvSpPr txBox="1"/>
           <p:nvPr/>
         </p:nvSpPr>
@@ -9518,7 +10108,7 @@
       </p:sp>
       <p:sp>
         <p:nvSpPr>
-          <p:cNvPr id="13" name="Shape 11"/>
+          <p:cNvPr id="15" name="Shape 12"/>
           <p:cNvSpPr/>
           <p:nvPr/>
         </p:nvSpPr>
@@ -9545,7 +10135,7 @@
       </p:sp>
       <p:sp>
         <p:nvSpPr>
-          <p:cNvPr id="14" name="Text 12"/>
+          <p:cNvPr id="16" name="Text 13"/>
           <p:cNvSpPr txBox="1"/>
           <p:nvPr/>
         </p:nvSpPr>
@@ -9584,7 +10174,7 @@
       </p:sp>
       <p:sp>
         <p:nvSpPr>
-          <p:cNvPr id="15" name="Text 13"/>
+          <p:cNvPr id="17" name="Text 14"/>
           <p:cNvSpPr txBox="1"/>
           <p:nvPr/>
         </p:nvSpPr>
@@ -9623,7 +10213,7 @@
       </p:sp>
       <p:sp>
         <p:nvSpPr>
-          <p:cNvPr id="16" name="Text 14"/>
+          <p:cNvPr id="18" name="Text 15"/>
           <p:cNvSpPr txBox="1"/>
           <p:nvPr/>
         </p:nvSpPr>
@@ -9665,7 +10255,7 @@
       </p:sp>
       <p:sp>
         <p:nvSpPr>
-          <p:cNvPr id="17" name="Shape 15"/>
+          <p:cNvPr id="19" name="Shape 16"/>
           <p:cNvSpPr/>
           <p:nvPr/>
         </p:nvSpPr>
@@ -9692,7 +10282,7 @@
       </p:sp>
       <p:sp>
         <p:nvSpPr>
-          <p:cNvPr id="18" name="Text 16"/>
+          <p:cNvPr id="20" name="Text 17"/>
           <p:cNvSpPr txBox="1"/>
           <p:nvPr/>
         </p:nvSpPr>
@@ -9731,7 +10321,7 @@
       </p:sp>
       <p:sp>
         <p:nvSpPr>
-          <p:cNvPr id="19" name="Text 17"/>
+          <p:cNvPr id="21" name="Text 18"/>
           <p:cNvSpPr txBox="1"/>
           <p:nvPr/>
         </p:nvSpPr>
@@ -9770,7 +10360,7 @@
       </p:sp>
       <p:sp>
         <p:nvSpPr>
-          <p:cNvPr id="20" name="Text 18"/>
+          <p:cNvPr id="22" name="Text 19"/>
           <p:cNvSpPr txBox="1"/>
           <p:nvPr/>
         </p:nvSpPr>
@@ -9812,7 +10402,7 @@
       </p:sp>
       <p:sp>
         <p:nvSpPr>
-          <p:cNvPr id="21" name="Shape 19"/>
+          <p:cNvPr id="23" name="Shape 20"/>
           <p:cNvSpPr/>
           <p:nvPr/>
         </p:nvSpPr>
@@ -9839,7 +10429,7 @@
       </p:sp>
       <p:sp>
         <p:nvSpPr>
-          <p:cNvPr id="22" name="Text 20"/>
+          <p:cNvPr id="24" name="Text 21"/>
           <p:cNvSpPr txBox="1"/>
           <p:nvPr/>
         </p:nvSpPr>
@@ -9878,7 +10468,7 @@
       </p:sp>
       <p:sp>
         <p:nvSpPr>
-          <p:cNvPr id="23" name="Text 21"/>
+          <p:cNvPr id="25" name="Text 22"/>
           <p:cNvSpPr txBox="1"/>
           <p:nvPr/>
         </p:nvSpPr>
@@ -9917,7 +10507,7 @@
       </p:sp>
       <p:sp>
         <p:nvSpPr>
-          <p:cNvPr id="24" name="Text 22"/>
+          <p:cNvPr id="26" name="Text 23"/>
           <p:cNvSpPr txBox="1"/>
           <p:nvPr/>
         </p:nvSpPr>
@@ -9959,7 +10549,7 @@
       </p:sp>
       <p:sp>
         <p:nvSpPr>
-          <p:cNvPr id="25" name="Shape 23"/>
+          <p:cNvPr id="27" name="Shape 24"/>
           <p:cNvSpPr/>
           <p:nvPr/>
         </p:nvSpPr>
@@ -9986,7 +10576,7 @@
       </p:sp>
       <p:sp>
         <p:nvSpPr>
-          <p:cNvPr id="26" name="Shape 24"/>
+          <p:cNvPr id="28" name="Shape 25"/>
           <p:cNvSpPr/>
           <p:nvPr/>
         </p:nvSpPr>
@@ -10006,7 +10596,7 @@
       </p:sp>
       <p:sp>
         <p:nvSpPr>
-          <p:cNvPr id="27" name="Text 25"/>
+          <p:cNvPr id="29" name="Text 26"/>
           <p:cNvSpPr txBox="1"/>
           <p:nvPr/>
         </p:nvSpPr>
@@ -10045,7 +10635,7 @@
       </p:sp>
       <p:sp>
         <p:nvSpPr>
-          <p:cNvPr id="28" name="Text 26"/>
+          <p:cNvPr id="30" name="Text 27"/>
           <p:cNvSpPr txBox="1"/>
           <p:nvPr/>
         </p:nvSpPr>
@@ -10137,9 +10727,72 @@
           <a:chExt cx="0" cy="0"/>
         </a:xfrm>
       </p:grpSpPr>
-      <p:sp>
-        <p:nvSpPr>
-          <p:cNvPr id="2" name="Text 0"/>
+      <p:pic>
+        <p:nvPicPr>
+          <p:cNvPr id="2" name="Image 0" descr="/sessions/compassionate-sweet-heisenberg/mnt/dev-aspath-life-main/tools/assets/logo-deck.png">    </p:cNvPr>
+          <p:cNvPicPr>
+            <a:picLocks noChangeAspect="1"/>
+          </p:cNvPicPr>
+          <p:nvPr/>
+        </p:nvPicPr>
+        <p:blipFill>
+          <a:blip r:embed="rId1"/>
+          <a:stretch>
+            <a:fillRect/>
+          </a:stretch>
+        </p:blipFill>
+        <p:spPr>
+          <a:xfrm>
+            <a:off x="11458173" y="109728"/>
+            <a:ext cx="209571" cy="256032"/>
+          </a:xfrm>
+          <a:prstGeom prst="rect">
+            <a:avLst/>
+          </a:prstGeom>
+        </p:spPr>
+      </p:pic>
+      <p:sp>
+        <p:nvSpPr>
+          <p:cNvPr id="3" name="Text 0"/>
+          <p:cNvSpPr txBox="1"/>
+          <p:nvPr/>
+        </p:nvSpPr>
+        <p:spPr>
+          <a:xfrm>
+            <a:off x="8623533" y="128016"/>
+            <a:ext cx="2743200" cy="237744"/>
+          </a:xfrm>
+          <a:prstGeom prst="rect">
+            <a:avLst/>
+          </a:prstGeom>
+          <a:noFill/>
+          <a:ln/>
+        </p:spPr>
+        <p:txBody>
+          <a:bodyPr wrap="square" lIns="0" tIns="0" rIns="0" bIns="0" rtlCol="0" anchor="ctr"/>
+          <a:lstStyle/>
+          <a:p>
+            <a:pPr algn="r" indent="0" marL="0">
+              <a:buNone/>
+            </a:pPr>
+            <a:r>
+              <a:rPr lang="en-US" sz="750" dirty="0">
+                <a:solidFill>
+                  <a:srgbClr val="97A9AF"/>
+                </a:solidFill>
+                <a:latin typeface="Meiryo" pitchFamily="34" charset="0"/>
+                <a:ea typeface="Meiryo" pitchFamily="34" charset="-122"/>
+                <a:cs typeface="Meiryo" pitchFamily="34" charset="-120"/>
+              </a:rPr>
+              <a:t>鹿児島のパーキンソン病専門トレーニングスタジオ</a:t>
+            </a:r>
+            <a:endParaRPr lang="en-US" sz="750" dirty="0"/>
+          </a:p>
+        </p:txBody>
+      </p:sp>
+      <p:sp>
+        <p:nvSpPr>
+          <p:cNvPr id="4" name="Text 1"/>
           <p:cNvSpPr txBox="1"/>
           <p:nvPr/>
         </p:nvSpPr>
@@ -10178,7 +10831,7 @@
       </p:sp>
       <p:sp>
         <p:nvSpPr>
-          <p:cNvPr id="3" name="Text 1"/>
+          <p:cNvPr id="5" name="Text 2"/>
           <p:cNvSpPr txBox="1"/>
           <p:nvPr/>
         </p:nvSpPr>
@@ -10217,7 +10870,7 @@
       </p:sp>
       <p:sp>
         <p:nvSpPr>
-          <p:cNvPr id="4" name="Text 2"/>
+          <p:cNvPr id="6" name="Text 3"/>
           <p:cNvSpPr txBox="1"/>
           <p:nvPr/>
         </p:nvSpPr>
@@ -10256,7 +10909,7 @@
       </p:sp>
       <p:sp>
         <p:nvSpPr>
-          <p:cNvPr id="5" name="Shape 3"/>
+          <p:cNvPr id="7" name="Shape 4"/>
           <p:cNvSpPr/>
           <p:nvPr/>
         </p:nvSpPr>
@@ -10283,7 +10936,7 @@
       </p:sp>
       <p:sp>
         <p:nvSpPr>
-          <p:cNvPr id="6" name="Shape 4"/>
+          <p:cNvPr id="8" name="Shape 5"/>
           <p:cNvSpPr/>
           <p:nvPr/>
         </p:nvSpPr>
@@ -10305,7 +10958,7 @@
       </p:sp>
       <p:sp>
         <p:nvSpPr>
-          <p:cNvPr id="7" name="Text 5"/>
+          <p:cNvPr id="9" name="Text 6"/>
           <p:cNvSpPr txBox="1"/>
           <p:nvPr/>
         </p:nvSpPr>
@@ -10344,7 +10997,7 @@
       </p:sp>
       <p:sp>
         <p:nvSpPr>
-          <p:cNvPr id="8" name="Text 6"/>
+          <p:cNvPr id="10" name="Text 7"/>
           <p:cNvSpPr txBox="1"/>
           <p:nvPr/>
         </p:nvSpPr>
@@ -10593,7 +11246,7 @@
       </p:sp>
       <p:sp>
         <p:nvSpPr>
-          <p:cNvPr id="9" name="Text 7"/>
+          <p:cNvPr id="11" name="Text 8"/>
           <p:cNvSpPr txBox="1"/>
           <p:nvPr/>
         </p:nvSpPr>
@@ -10632,7 +11285,7 @@
       </p:sp>
       <p:sp>
         <p:nvSpPr>
-          <p:cNvPr id="10" name="Shape 8"/>
+          <p:cNvPr id="12" name="Shape 9"/>
           <p:cNvSpPr/>
           <p:nvPr/>
         </p:nvSpPr>
@@ -10659,7 +11312,7 @@
       </p:sp>
       <p:sp>
         <p:nvSpPr>
-          <p:cNvPr id="11" name="Text 9"/>
+          <p:cNvPr id="13" name="Text 10"/>
           <p:cNvSpPr txBox="1"/>
           <p:nvPr/>
         </p:nvSpPr>
@@ -10701,7 +11354,7 @@
       </p:sp>
       <p:sp>
         <p:nvSpPr>
-          <p:cNvPr id="12" name="Shape 10"/>
+          <p:cNvPr id="14" name="Shape 11"/>
           <p:cNvSpPr/>
           <p:nvPr/>
         </p:nvSpPr>
@@ -10728,7 +11381,7 @@
       </p:sp>
       <p:sp>
         <p:nvSpPr>
-          <p:cNvPr id="13" name="Text 11"/>
+          <p:cNvPr id="15" name="Text 12"/>
           <p:cNvSpPr txBox="1"/>
           <p:nvPr/>
         </p:nvSpPr>
@@ -10770,7 +11423,7 @@
       </p:sp>
       <p:sp>
         <p:nvSpPr>
-          <p:cNvPr id="14" name="Shape 12"/>
+          <p:cNvPr id="16" name="Shape 13"/>
           <p:cNvSpPr/>
           <p:nvPr/>
         </p:nvSpPr>
@@ -10797,7 +11450,7 @@
       </p:sp>
       <p:sp>
         <p:nvSpPr>
-          <p:cNvPr id="15" name="Shape 13"/>
+          <p:cNvPr id="17" name="Shape 14"/>
           <p:cNvSpPr/>
           <p:nvPr/>
         </p:nvSpPr>
@@ -10817,7 +11470,7 @@
       </p:sp>
       <p:sp>
         <p:nvSpPr>
-          <p:cNvPr id="16" name="Text 14"/>
+          <p:cNvPr id="18" name="Text 15"/>
           <p:cNvSpPr txBox="1"/>
           <p:nvPr/>
         </p:nvSpPr>
@@ -10856,7 +11509,7 @@
       </p:sp>
       <p:sp>
         <p:nvSpPr>
-          <p:cNvPr id="17" name="Text 15"/>
+          <p:cNvPr id="19" name="Text 16"/>
           <p:cNvSpPr txBox="1"/>
           <p:nvPr/>
         </p:nvSpPr>
@@ -10918,7 +11571,7 @@
       </p:sp>
       <p:sp>
         <p:nvSpPr>
-          <p:cNvPr id="18" name="Shape 16"/>
+          <p:cNvPr id="20" name="Shape 17"/>
           <p:cNvSpPr/>
           <p:nvPr/>
         </p:nvSpPr>
@@ -10945,7 +11598,7 @@
       </p:sp>
       <p:sp>
         <p:nvSpPr>
-          <p:cNvPr id="19" name="Shape 17"/>
+          <p:cNvPr id="21" name="Shape 18"/>
           <p:cNvSpPr/>
           <p:nvPr/>
         </p:nvSpPr>
@@ -10965,7 +11618,7 @@
       </p:sp>
       <p:sp>
         <p:nvSpPr>
-          <p:cNvPr id="20" name="Text 18"/>
+          <p:cNvPr id="22" name="Text 19"/>
           <p:cNvSpPr txBox="1"/>
           <p:nvPr/>
         </p:nvSpPr>
@@ -11004,7 +11657,7 @@
       </p:sp>
       <p:sp>
         <p:nvSpPr>
-          <p:cNvPr id="21" name="Text 19"/>
+          <p:cNvPr id="23" name="Text 20"/>
           <p:cNvSpPr txBox="1"/>
           <p:nvPr/>
         </p:nvSpPr>
@@ -11082,9 +11735,72 @@
           <a:chExt cx="0" cy="0"/>
         </a:xfrm>
       </p:grpSpPr>
-      <p:sp>
-        <p:nvSpPr>
-          <p:cNvPr id="2" name="Text 0"/>
+      <p:pic>
+        <p:nvPicPr>
+          <p:cNvPr id="2" name="Image 0" descr="/sessions/compassionate-sweet-heisenberg/mnt/dev-aspath-life-main/tools/assets/logo-deck.png">    </p:cNvPr>
+          <p:cNvPicPr>
+            <a:picLocks noChangeAspect="1"/>
+          </p:cNvPicPr>
+          <p:nvPr/>
+        </p:nvPicPr>
+        <p:blipFill>
+          <a:blip r:embed="rId1"/>
+          <a:stretch>
+            <a:fillRect/>
+          </a:stretch>
+        </p:blipFill>
+        <p:spPr>
+          <a:xfrm>
+            <a:off x="11458173" y="109728"/>
+            <a:ext cx="209571" cy="256032"/>
+          </a:xfrm>
+          <a:prstGeom prst="rect">
+            <a:avLst/>
+          </a:prstGeom>
+        </p:spPr>
+      </p:pic>
+      <p:sp>
+        <p:nvSpPr>
+          <p:cNvPr id="3" name="Text 0"/>
+          <p:cNvSpPr txBox="1"/>
+          <p:nvPr/>
+        </p:nvSpPr>
+        <p:spPr>
+          <a:xfrm>
+            <a:off x="8623533" y="128016"/>
+            <a:ext cx="2743200" cy="237744"/>
+          </a:xfrm>
+          <a:prstGeom prst="rect">
+            <a:avLst/>
+          </a:prstGeom>
+          <a:noFill/>
+          <a:ln/>
+        </p:spPr>
+        <p:txBody>
+          <a:bodyPr wrap="square" lIns="0" tIns="0" rIns="0" bIns="0" rtlCol="0" anchor="ctr"/>
+          <a:lstStyle/>
+          <a:p>
+            <a:pPr algn="r" indent="0" marL="0">
+              <a:buNone/>
+            </a:pPr>
+            <a:r>
+              <a:rPr lang="en-US" sz="750" dirty="0">
+                <a:solidFill>
+                  <a:srgbClr val="97A9AF"/>
+                </a:solidFill>
+                <a:latin typeface="Meiryo" pitchFamily="34" charset="0"/>
+                <a:ea typeface="Meiryo" pitchFamily="34" charset="-122"/>
+                <a:cs typeface="Meiryo" pitchFamily="34" charset="-120"/>
+              </a:rPr>
+              <a:t>鹿児島のパーキンソン病専門トレーニングスタジオ</a:t>
+            </a:r>
+            <a:endParaRPr lang="en-US" sz="750" dirty="0"/>
+          </a:p>
+        </p:txBody>
+      </p:sp>
+      <p:sp>
+        <p:nvSpPr>
+          <p:cNvPr id="4" name="Text 1"/>
           <p:cNvSpPr txBox="1"/>
           <p:nvPr/>
         </p:nvSpPr>
@@ -11123,7 +11839,7 @@
       </p:sp>
       <p:sp>
         <p:nvSpPr>
-          <p:cNvPr id="3" name="Text 1"/>
+          <p:cNvPr id="5" name="Text 2"/>
           <p:cNvSpPr txBox="1"/>
           <p:nvPr/>
         </p:nvSpPr>
@@ -11162,7 +11878,7 @@
       </p:sp>
       <p:sp>
         <p:nvSpPr>
-          <p:cNvPr id="4" name="Text 2"/>
+          <p:cNvPr id="6" name="Text 3"/>
           <p:cNvSpPr txBox="1"/>
           <p:nvPr/>
         </p:nvSpPr>
@@ -11201,7 +11917,7 @@
       </p:sp>
       <p:sp>
         <p:nvSpPr>
-          <p:cNvPr id="5" name="Shape 3"/>
+          <p:cNvPr id="7" name="Shape 4"/>
           <p:cNvSpPr/>
           <p:nvPr/>
         </p:nvSpPr>
@@ -11228,7 +11944,7 @@
       </p:sp>
       <p:sp>
         <p:nvSpPr>
-          <p:cNvPr id="6" name="Shape 4"/>
+          <p:cNvPr id="8" name="Shape 5"/>
           <p:cNvSpPr/>
           <p:nvPr/>
         </p:nvSpPr>
@@ -11250,7 +11966,7 @@
       </p:sp>
       <p:sp>
         <p:nvSpPr>
-          <p:cNvPr id="7" name="Text 5"/>
+          <p:cNvPr id="9" name="Text 6"/>
           <p:cNvSpPr txBox="1"/>
           <p:nvPr/>
         </p:nvSpPr>
@@ -11289,7 +12005,7 @@
       </p:sp>
       <p:sp>
         <p:nvSpPr>
-          <p:cNvPr id="8" name="Text 6"/>
+          <p:cNvPr id="10" name="Text 7"/>
           <p:cNvSpPr txBox="1"/>
           <p:nvPr/>
         </p:nvSpPr>
@@ -11489,7 +12205,7 @@
       </p:sp>
       <p:sp>
         <p:nvSpPr>
-          <p:cNvPr id="9" name="Text 7"/>
+          <p:cNvPr id="11" name="Text 8"/>
           <p:cNvSpPr txBox="1"/>
           <p:nvPr/>
         </p:nvSpPr>
@@ -11528,7 +12244,7 @@
       </p:sp>
       <p:sp>
         <p:nvSpPr>
-          <p:cNvPr id="10" name="Shape 8"/>
+          <p:cNvPr id="12" name="Shape 9"/>
           <p:cNvSpPr/>
           <p:nvPr/>
         </p:nvSpPr>
@@ -11555,7 +12271,7 @@
       </p:sp>
       <p:sp>
         <p:nvSpPr>
-          <p:cNvPr id="11" name="Text 9"/>
+          <p:cNvPr id="13" name="Text 10"/>
           <p:cNvSpPr txBox="1"/>
           <p:nvPr/>
         </p:nvSpPr>
@@ -11597,7 +12313,7 @@
       </p:sp>
       <p:sp>
         <p:nvSpPr>
-          <p:cNvPr id="12" name="Shape 10"/>
+          <p:cNvPr id="14" name="Shape 11"/>
           <p:cNvSpPr/>
           <p:nvPr/>
         </p:nvSpPr>
@@ -11624,7 +12340,7 @@
       </p:sp>
       <p:sp>
         <p:nvSpPr>
-          <p:cNvPr id="13" name="Text 11"/>
+          <p:cNvPr id="15" name="Text 12"/>
           <p:cNvSpPr txBox="1"/>
           <p:nvPr/>
         </p:nvSpPr>
@@ -11666,7 +12382,7 @@
       </p:sp>
       <p:sp>
         <p:nvSpPr>
-          <p:cNvPr id="14" name="Shape 12"/>
+          <p:cNvPr id="16" name="Shape 13"/>
           <p:cNvSpPr/>
           <p:nvPr/>
         </p:nvSpPr>
@@ -11693,7 +12409,7 @@
       </p:sp>
       <p:sp>
         <p:nvSpPr>
-          <p:cNvPr id="15" name="Shape 13"/>
+          <p:cNvPr id="17" name="Shape 14"/>
           <p:cNvSpPr/>
           <p:nvPr/>
         </p:nvSpPr>
@@ -11713,7 +12429,7 @@
       </p:sp>
       <p:sp>
         <p:nvSpPr>
-          <p:cNvPr id="16" name="Text 14"/>
+          <p:cNvPr id="18" name="Text 15"/>
           <p:cNvSpPr txBox="1"/>
           <p:nvPr/>
         </p:nvSpPr>
@@ -11752,7 +12468,7 @@
       </p:sp>
       <p:sp>
         <p:nvSpPr>
-          <p:cNvPr id="17" name="Text 15"/>
+          <p:cNvPr id="19" name="Text 16"/>
           <p:cNvSpPr txBox="1"/>
           <p:nvPr/>
         </p:nvSpPr>
@@ -11814,7 +12530,7 @@
       </p:sp>
       <p:sp>
         <p:nvSpPr>
-          <p:cNvPr id="18" name="Shape 16"/>
+          <p:cNvPr id="20" name="Shape 17"/>
           <p:cNvSpPr/>
           <p:nvPr/>
         </p:nvSpPr>
@@ -11841,7 +12557,7 @@
       </p:sp>
       <p:sp>
         <p:nvSpPr>
-          <p:cNvPr id="19" name="Shape 17"/>
+          <p:cNvPr id="21" name="Shape 18"/>
           <p:cNvSpPr/>
           <p:nvPr/>
         </p:nvSpPr>
@@ -11861,7 +12577,7 @@
       </p:sp>
       <p:sp>
         <p:nvSpPr>
-          <p:cNvPr id="20" name="Text 18"/>
+          <p:cNvPr id="22" name="Text 19"/>
           <p:cNvSpPr txBox="1"/>
           <p:nvPr/>
         </p:nvSpPr>
@@ -11900,7 +12616,7 @@
       </p:sp>
       <p:sp>
         <p:nvSpPr>
-          <p:cNvPr id="21" name="Text 19"/>
+          <p:cNvPr id="23" name="Text 20"/>
           <p:cNvSpPr txBox="1"/>
           <p:nvPr/>
         </p:nvSpPr>
@@ -11978,9 +12694,72 @@
           <a:chExt cx="0" cy="0"/>
         </a:xfrm>
       </p:grpSpPr>
-      <p:sp>
-        <p:nvSpPr>
-          <p:cNvPr id="2" name="Text 0"/>
+      <p:pic>
+        <p:nvPicPr>
+          <p:cNvPr id="2" name="Image 0" descr="/sessions/compassionate-sweet-heisenberg/mnt/dev-aspath-life-main/tools/assets/logo-deck.png">    </p:cNvPr>
+          <p:cNvPicPr>
+            <a:picLocks noChangeAspect="1"/>
+          </p:cNvPicPr>
+          <p:nvPr/>
+        </p:nvPicPr>
+        <p:blipFill>
+          <a:blip r:embed="rId1"/>
+          <a:stretch>
+            <a:fillRect/>
+          </a:stretch>
+        </p:blipFill>
+        <p:spPr>
+          <a:xfrm>
+            <a:off x="11458173" y="109728"/>
+            <a:ext cx="209571" cy="256032"/>
+          </a:xfrm>
+          <a:prstGeom prst="rect">
+            <a:avLst/>
+          </a:prstGeom>
+        </p:spPr>
+      </p:pic>
+      <p:sp>
+        <p:nvSpPr>
+          <p:cNvPr id="3" name="Text 0"/>
+          <p:cNvSpPr txBox="1"/>
+          <p:nvPr/>
+        </p:nvSpPr>
+        <p:spPr>
+          <a:xfrm>
+            <a:off x="8623533" y="128016"/>
+            <a:ext cx="2743200" cy="237744"/>
+          </a:xfrm>
+          <a:prstGeom prst="rect">
+            <a:avLst/>
+          </a:prstGeom>
+          <a:noFill/>
+          <a:ln/>
+        </p:spPr>
+        <p:txBody>
+          <a:bodyPr wrap="square" lIns="0" tIns="0" rIns="0" bIns="0" rtlCol="0" anchor="ctr"/>
+          <a:lstStyle/>
+          <a:p>
+            <a:pPr algn="r" indent="0" marL="0">
+              <a:buNone/>
+            </a:pPr>
+            <a:r>
+              <a:rPr lang="en-US" sz="750" dirty="0">
+                <a:solidFill>
+                  <a:srgbClr val="97A9AF"/>
+                </a:solidFill>
+                <a:latin typeface="Meiryo" pitchFamily="34" charset="0"/>
+                <a:ea typeface="Meiryo" pitchFamily="34" charset="-122"/>
+                <a:cs typeface="Meiryo" pitchFamily="34" charset="-120"/>
+              </a:rPr>
+              <a:t>鹿児島のパーキンソン病専門トレーニングスタジオ</a:t>
+            </a:r>
+            <a:endParaRPr lang="en-US" sz="750" dirty="0"/>
+          </a:p>
+        </p:txBody>
+      </p:sp>
+      <p:sp>
+        <p:nvSpPr>
+          <p:cNvPr id="4" name="Text 1"/>
           <p:cNvSpPr txBox="1"/>
           <p:nvPr/>
         </p:nvSpPr>
@@ -12019,7 +12798,7 @@
       </p:sp>
       <p:sp>
         <p:nvSpPr>
-          <p:cNvPr id="3" name="Text 1"/>
+          <p:cNvPr id="5" name="Text 2"/>
           <p:cNvSpPr txBox="1"/>
           <p:nvPr/>
         </p:nvSpPr>
@@ -12058,7 +12837,7 @@
       </p:sp>
       <p:sp>
         <p:nvSpPr>
-          <p:cNvPr id="4" name="Text 2"/>
+          <p:cNvPr id="6" name="Text 3"/>
           <p:cNvSpPr txBox="1"/>
           <p:nvPr/>
         </p:nvSpPr>
@@ -12097,7 +12876,7 @@
       </p:sp>
       <p:sp>
         <p:nvSpPr>
-          <p:cNvPr id="5" name="Shape 3"/>
+          <p:cNvPr id="7" name="Shape 4"/>
           <p:cNvSpPr/>
           <p:nvPr/>
         </p:nvSpPr>
@@ -12124,7 +12903,7 @@
       </p:sp>
       <p:sp>
         <p:nvSpPr>
-          <p:cNvPr id="6" name="Shape 4"/>
+          <p:cNvPr id="8" name="Shape 5"/>
           <p:cNvSpPr/>
           <p:nvPr/>
         </p:nvSpPr>
@@ -12146,7 +12925,7 @@
       </p:sp>
       <p:sp>
         <p:nvSpPr>
-          <p:cNvPr id="7" name="Text 5"/>
+          <p:cNvPr id="9" name="Text 6"/>
           <p:cNvSpPr txBox="1"/>
           <p:nvPr/>
         </p:nvSpPr>
@@ -12185,7 +12964,7 @@
       </p:sp>
       <p:sp>
         <p:nvSpPr>
-          <p:cNvPr id="8" name="Text 6"/>
+          <p:cNvPr id="10" name="Text 7"/>
           <p:cNvSpPr txBox="1"/>
           <p:nvPr/>
         </p:nvSpPr>
@@ -12376,7 +13155,7 @@
       </p:sp>
       <p:sp>
         <p:nvSpPr>
-          <p:cNvPr id="9" name="Text 7"/>
+          <p:cNvPr id="11" name="Text 8"/>
           <p:cNvSpPr txBox="1"/>
           <p:nvPr/>
         </p:nvSpPr>
@@ -12415,7 +13194,7 @@
       </p:sp>
       <p:sp>
         <p:nvSpPr>
-          <p:cNvPr id="10" name="Shape 8"/>
+          <p:cNvPr id="12" name="Shape 9"/>
           <p:cNvSpPr/>
           <p:nvPr/>
         </p:nvSpPr>
@@ -12442,7 +13221,7 @@
       </p:sp>
       <p:sp>
         <p:nvSpPr>
-          <p:cNvPr id="11" name="Text 9"/>
+          <p:cNvPr id="13" name="Text 10"/>
           <p:cNvSpPr txBox="1"/>
           <p:nvPr/>
         </p:nvSpPr>
@@ -12484,7 +13263,7 @@
       </p:sp>
       <p:sp>
         <p:nvSpPr>
-          <p:cNvPr id="12" name="Shape 10"/>
+          <p:cNvPr id="14" name="Shape 11"/>
           <p:cNvSpPr/>
           <p:nvPr/>
         </p:nvSpPr>
@@ -12511,7 +13290,7 @@
       </p:sp>
       <p:sp>
         <p:nvSpPr>
-          <p:cNvPr id="13" name="Text 11"/>
+          <p:cNvPr id="15" name="Text 12"/>
           <p:cNvSpPr txBox="1"/>
           <p:nvPr/>
         </p:nvSpPr>
@@ -12553,7 +13332,7 @@
       </p:sp>
       <p:sp>
         <p:nvSpPr>
-          <p:cNvPr id="14" name="Shape 12"/>
+          <p:cNvPr id="16" name="Shape 13"/>
           <p:cNvSpPr/>
           <p:nvPr/>
         </p:nvSpPr>
@@ -12580,7 +13359,7 @@
       </p:sp>
       <p:sp>
         <p:nvSpPr>
-          <p:cNvPr id="15" name="Shape 13"/>
+          <p:cNvPr id="17" name="Shape 14"/>
           <p:cNvSpPr/>
           <p:nvPr/>
         </p:nvSpPr>
@@ -12600,7 +13379,7 @@
       </p:sp>
       <p:sp>
         <p:nvSpPr>
-          <p:cNvPr id="16" name="Text 14"/>
+          <p:cNvPr id="18" name="Text 15"/>
           <p:cNvSpPr txBox="1"/>
           <p:nvPr/>
         </p:nvSpPr>
@@ -12639,7 +13418,7 @@
       </p:sp>
       <p:sp>
         <p:nvSpPr>
-          <p:cNvPr id="17" name="Text 15"/>
+          <p:cNvPr id="19" name="Text 16"/>
           <p:cNvSpPr txBox="1"/>
           <p:nvPr/>
         </p:nvSpPr>
@@ -12701,7 +13480,7 @@
       </p:sp>
       <p:sp>
         <p:nvSpPr>
-          <p:cNvPr id="18" name="Shape 16"/>
+          <p:cNvPr id="20" name="Shape 17"/>
           <p:cNvSpPr/>
           <p:nvPr/>
         </p:nvSpPr>
@@ -12728,7 +13507,7 @@
       </p:sp>
       <p:sp>
         <p:nvSpPr>
-          <p:cNvPr id="19" name="Shape 17"/>
+          <p:cNvPr id="21" name="Shape 18"/>
           <p:cNvSpPr/>
           <p:nvPr/>
         </p:nvSpPr>
@@ -12748,7 +13527,7 @@
       </p:sp>
       <p:sp>
         <p:nvSpPr>
-          <p:cNvPr id="20" name="Text 18"/>
+          <p:cNvPr id="22" name="Text 19"/>
           <p:cNvSpPr txBox="1"/>
           <p:nvPr/>
         </p:nvSpPr>
@@ -12787,7 +13566,7 @@
       </p:sp>
       <p:sp>
         <p:nvSpPr>
-          <p:cNvPr id="21" name="Text 19"/>
+          <p:cNvPr id="23" name="Text 20"/>
           <p:cNvSpPr txBox="1"/>
           <p:nvPr/>
         </p:nvSpPr>
@@ -12865,9 +13644,72 @@
           <a:chExt cx="0" cy="0"/>
         </a:xfrm>
       </p:grpSpPr>
-      <p:sp>
-        <p:nvSpPr>
-          <p:cNvPr id="2" name="Text 0"/>
+      <p:pic>
+        <p:nvPicPr>
+          <p:cNvPr id="2" name="Image 0" descr="/sessions/compassionate-sweet-heisenberg/mnt/dev-aspath-life-main/tools/assets/logo-deck.png">    </p:cNvPr>
+          <p:cNvPicPr>
+            <a:picLocks noChangeAspect="1"/>
+          </p:cNvPicPr>
+          <p:nvPr/>
+        </p:nvPicPr>
+        <p:blipFill>
+          <a:blip r:embed="rId1"/>
+          <a:stretch>
+            <a:fillRect/>
+          </a:stretch>
+        </p:blipFill>
+        <p:spPr>
+          <a:xfrm>
+            <a:off x="11458173" y="109728"/>
+            <a:ext cx="209571" cy="256032"/>
+          </a:xfrm>
+          <a:prstGeom prst="rect">
+            <a:avLst/>
+          </a:prstGeom>
+        </p:spPr>
+      </p:pic>
+      <p:sp>
+        <p:nvSpPr>
+          <p:cNvPr id="3" name="Text 0"/>
+          <p:cNvSpPr txBox="1"/>
+          <p:nvPr/>
+        </p:nvSpPr>
+        <p:spPr>
+          <a:xfrm>
+            <a:off x="8623533" y="128016"/>
+            <a:ext cx="2743200" cy="237744"/>
+          </a:xfrm>
+          <a:prstGeom prst="rect">
+            <a:avLst/>
+          </a:prstGeom>
+          <a:noFill/>
+          <a:ln/>
+        </p:spPr>
+        <p:txBody>
+          <a:bodyPr wrap="square" lIns="0" tIns="0" rIns="0" bIns="0" rtlCol="0" anchor="ctr"/>
+          <a:lstStyle/>
+          <a:p>
+            <a:pPr algn="r" indent="0" marL="0">
+              <a:buNone/>
+            </a:pPr>
+            <a:r>
+              <a:rPr lang="en-US" sz="750" dirty="0">
+                <a:solidFill>
+                  <a:srgbClr val="97A9AF"/>
+                </a:solidFill>
+                <a:latin typeface="Meiryo" pitchFamily="34" charset="0"/>
+                <a:ea typeface="Meiryo" pitchFamily="34" charset="-122"/>
+                <a:cs typeface="Meiryo" pitchFamily="34" charset="-120"/>
+              </a:rPr>
+              <a:t>鹿児島のパーキンソン病専門トレーニングスタジオ</a:t>
+            </a:r>
+            <a:endParaRPr lang="en-US" sz="750" dirty="0"/>
+          </a:p>
+        </p:txBody>
+      </p:sp>
+      <p:sp>
+        <p:nvSpPr>
+          <p:cNvPr id="4" name="Text 1"/>
           <p:cNvSpPr txBox="1"/>
           <p:nvPr/>
         </p:nvSpPr>
@@ -12906,7 +13748,7 @@
       </p:sp>
       <p:sp>
         <p:nvSpPr>
-          <p:cNvPr id="3" name="Text 1"/>
+          <p:cNvPr id="5" name="Text 2"/>
           <p:cNvSpPr txBox="1"/>
           <p:nvPr/>
         </p:nvSpPr>
@@ -12945,7 +13787,7 @@
       </p:sp>
       <p:sp>
         <p:nvSpPr>
-          <p:cNvPr id="4" name="Text 2"/>
+          <p:cNvPr id="6" name="Text 3"/>
           <p:cNvSpPr txBox="1"/>
           <p:nvPr/>
         </p:nvSpPr>
@@ -12984,7 +13826,7 @@
       </p:sp>
       <p:sp>
         <p:nvSpPr>
-          <p:cNvPr id="5" name="Shape 3"/>
+          <p:cNvPr id="7" name="Shape 4"/>
           <p:cNvSpPr/>
           <p:nvPr/>
         </p:nvSpPr>
@@ -13011,7 +13853,7 @@
       </p:sp>
       <p:sp>
         <p:nvSpPr>
-          <p:cNvPr id="6" name="Shape 4"/>
+          <p:cNvPr id="8" name="Shape 5"/>
           <p:cNvSpPr/>
           <p:nvPr/>
         </p:nvSpPr>
@@ -13033,7 +13875,7 @@
       </p:sp>
       <p:sp>
         <p:nvSpPr>
-          <p:cNvPr id="7" name="Text 5"/>
+          <p:cNvPr id="9" name="Text 6"/>
           <p:cNvSpPr txBox="1"/>
           <p:nvPr/>
         </p:nvSpPr>
@@ -13072,7 +13914,7 @@
       </p:sp>
       <p:sp>
         <p:nvSpPr>
-          <p:cNvPr id="8" name="Text 6"/>
+          <p:cNvPr id="10" name="Text 7"/>
           <p:cNvSpPr txBox="1"/>
           <p:nvPr/>
         </p:nvSpPr>
@@ -13292,7 +14134,7 @@
       </p:sp>
       <p:sp>
         <p:nvSpPr>
-          <p:cNvPr id="9" name="Text 7"/>
+          <p:cNvPr id="11" name="Text 8"/>
           <p:cNvSpPr txBox="1"/>
           <p:nvPr/>
         </p:nvSpPr>
@@ -13331,7 +14173,7 @@
       </p:sp>
       <p:sp>
         <p:nvSpPr>
-          <p:cNvPr id="10" name="Shape 8"/>
+          <p:cNvPr id="12" name="Shape 9"/>
           <p:cNvSpPr/>
           <p:nvPr/>
         </p:nvSpPr>
@@ -13358,7 +14200,7 @@
       </p:sp>
       <p:sp>
         <p:nvSpPr>
-          <p:cNvPr id="11" name="Text 9"/>
+          <p:cNvPr id="13" name="Text 10"/>
           <p:cNvSpPr txBox="1"/>
           <p:nvPr/>
         </p:nvSpPr>
@@ -13400,7 +14242,7 @@
       </p:sp>
       <p:sp>
         <p:nvSpPr>
-          <p:cNvPr id="12" name="Shape 10"/>
+          <p:cNvPr id="14" name="Shape 11"/>
           <p:cNvSpPr/>
           <p:nvPr/>
         </p:nvSpPr>
@@ -13427,7 +14269,7 @@
       </p:sp>
       <p:sp>
         <p:nvSpPr>
-          <p:cNvPr id="13" name="Text 11"/>
+          <p:cNvPr id="15" name="Text 12"/>
           <p:cNvSpPr txBox="1"/>
           <p:nvPr/>
         </p:nvSpPr>
@@ -13469,7 +14311,7 @@
       </p:sp>
       <p:sp>
         <p:nvSpPr>
-          <p:cNvPr id="14" name="Shape 12"/>
+          <p:cNvPr id="16" name="Shape 13"/>
           <p:cNvSpPr/>
           <p:nvPr/>
         </p:nvSpPr>
@@ -13496,7 +14338,7 @@
       </p:sp>
       <p:sp>
         <p:nvSpPr>
-          <p:cNvPr id="15" name="Shape 13"/>
+          <p:cNvPr id="17" name="Shape 14"/>
           <p:cNvSpPr/>
           <p:nvPr/>
         </p:nvSpPr>
@@ -13516,7 +14358,7 @@
       </p:sp>
       <p:sp>
         <p:nvSpPr>
-          <p:cNvPr id="16" name="Text 14"/>
+          <p:cNvPr id="18" name="Text 15"/>
           <p:cNvSpPr txBox="1"/>
           <p:nvPr/>
         </p:nvSpPr>
@@ -13555,7 +14397,7 @@
       </p:sp>
       <p:sp>
         <p:nvSpPr>
-          <p:cNvPr id="17" name="Text 15"/>
+          <p:cNvPr id="19" name="Text 16"/>
           <p:cNvSpPr txBox="1"/>
           <p:nvPr/>
         </p:nvSpPr>
@@ -13617,7 +14459,7 @@
       </p:sp>
       <p:sp>
         <p:nvSpPr>
-          <p:cNvPr id="18" name="Shape 16"/>
+          <p:cNvPr id="20" name="Shape 17"/>
           <p:cNvSpPr/>
           <p:nvPr/>
         </p:nvSpPr>
@@ -13644,7 +14486,7 @@
       </p:sp>
       <p:sp>
         <p:nvSpPr>
-          <p:cNvPr id="19" name="Shape 17"/>
+          <p:cNvPr id="21" name="Shape 18"/>
           <p:cNvSpPr/>
           <p:nvPr/>
         </p:nvSpPr>
@@ -13664,7 +14506,7 @@
       </p:sp>
       <p:sp>
         <p:nvSpPr>
-          <p:cNvPr id="20" name="Text 18"/>
+          <p:cNvPr id="22" name="Text 19"/>
           <p:cNvSpPr txBox="1"/>
           <p:nvPr/>
         </p:nvSpPr>
@@ -13703,7 +14545,7 @@
       </p:sp>
       <p:sp>
         <p:nvSpPr>
-          <p:cNvPr id="21" name="Text 19"/>
+          <p:cNvPr id="23" name="Text 20"/>
           <p:cNvSpPr txBox="1"/>
           <p:nvPr/>
         </p:nvSpPr>
@@ -13781,9 +14623,72 @@
           <a:chExt cx="0" cy="0"/>
         </a:xfrm>
       </p:grpSpPr>
-      <p:sp>
-        <p:nvSpPr>
-          <p:cNvPr id="2" name="Text 0"/>
+      <p:pic>
+        <p:nvPicPr>
+          <p:cNvPr id="2" name="Image 0" descr="/sessions/compassionate-sweet-heisenberg/mnt/dev-aspath-life-main/tools/assets/logo-deck.png">    </p:cNvPr>
+          <p:cNvPicPr>
+            <a:picLocks noChangeAspect="1"/>
+          </p:cNvPicPr>
+          <p:nvPr/>
+        </p:nvPicPr>
+        <p:blipFill>
+          <a:blip r:embed="rId1"/>
+          <a:stretch>
+            <a:fillRect/>
+          </a:stretch>
+        </p:blipFill>
+        <p:spPr>
+          <a:xfrm>
+            <a:off x="11458173" y="109728"/>
+            <a:ext cx="209571" cy="256032"/>
+          </a:xfrm>
+          <a:prstGeom prst="rect">
+            <a:avLst/>
+          </a:prstGeom>
+        </p:spPr>
+      </p:pic>
+      <p:sp>
+        <p:nvSpPr>
+          <p:cNvPr id="3" name="Text 0"/>
+          <p:cNvSpPr txBox="1"/>
+          <p:nvPr/>
+        </p:nvSpPr>
+        <p:spPr>
+          <a:xfrm>
+            <a:off x="8623533" y="128016"/>
+            <a:ext cx="2743200" cy="237744"/>
+          </a:xfrm>
+          <a:prstGeom prst="rect">
+            <a:avLst/>
+          </a:prstGeom>
+          <a:noFill/>
+          <a:ln/>
+        </p:spPr>
+        <p:txBody>
+          <a:bodyPr wrap="square" lIns="0" tIns="0" rIns="0" bIns="0" rtlCol="0" anchor="ctr"/>
+          <a:lstStyle/>
+          <a:p>
+            <a:pPr algn="r" indent="0" marL="0">
+              <a:buNone/>
+            </a:pPr>
+            <a:r>
+              <a:rPr lang="en-US" sz="750" dirty="0">
+                <a:solidFill>
+                  <a:srgbClr val="97A9AF"/>
+                </a:solidFill>
+                <a:latin typeface="Meiryo" pitchFamily="34" charset="0"/>
+                <a:ea typeface="Meiryo" pitchFamily="34" charset="-122"/>
+                <a:cs typeface="Meiryo" pitchFamily="34" charset="-120"/>
+              </a:rPr>
+              <a:t>鹿児島のパーキンソン病専門トレーニングスタジオ</a:t>
+            </a:r>
+            <a:endParaRPr lang="en-US" sz="750" dirty="0"/>
+          </a:p>
+        </p:txBody>
+      </p:sp>
+      <p:sp>
+        <p:nvSpPr>
+          <p:cNvPr id="4" name="Text 1"/>
           <p:cNvSpPr txBox="1"/>
           <p:nvPr/>
         </p:nvSpPr>
@@ -13822,7 +14727,7 @@
       </p:sp>
       <p:sp>
         <p:nvSpPr>
-          <p:cNvPr id="3" name="Text 1"/>
+          <p:cNvPr id="5" name="Text 2"/>
           <p:cNvSpPr txBox="1"/>
           <p:nvPr/>
         </p:nvSpPr>
@@ -13861,7 +14766,7 @@
       </p:sp>
       <p:sp>
         <p:nvSpPr>
-          <p:cNvPr id="4" name="Text 2"/>
+          <p:cNvPr id="6" name="Text 3"/>
           <p:cNvSpPr txBox="1"/>
           <p:nvPr/>
         </p:nvSpPr>
@@ -13900,7 +14805,7 @@
       </p:sp>
       <p:sp>
         <p:nvSpPr>
-          <p:cNvPr id="5" name="Shape 3"/>
+          <p:cNvPr id="7" name="Shape 4"/>
           <p:cNvSpPr/>
           <p:nvPr/>
         </p:nvSpPr>
@@ -13927,7 +14832,7 @@
       </p:sp>
       <p:sp>
         <p:nvSpPr>
-          <p:cNvPr id="6" name="Shape 4"/>
+          <p:cNvPr id="8" name="Shape 5"/>
           <p:cNvSpPr/>
           <p:nvPr/>
         </p:nvSpPr>
@@ -13949,7 +14854,7 @@
       </p:sp>
       <p:sp>
         <p:nvSpPr>
-          <p:cNvPr id="7" name="Text 5"/>
+          <p:cNvPr id="9" name="Text 6"/>
           <p:cNvSpPr txBox="1"/>
           <p:nvPr/>
         </p:nvSpPr>
@@ -13988,7 +14893,7 @@
       </p:sp>
       <p:sp>
         <p:nvSpPr>
-          <p:cNvPr id="8" name="Text 6"/>
+          <p:cNvPr id="10" name="Text 7"/>
           <p:cNvSpPr txBox="1"/>
           <p:nvPr/>
         </p:nvSpPr>
@@ -14257,7 +15162,7 @@
       </p:sp>
       <p:sp>
         <p:nvSpPr>
-          <p:cNvPr id="9" name="Text 7"/>
+          <p:cNvPr id="11" name="Text 8"/>
           <p:cNvSpPr txBox="1"/>
           <p:nvPr/>
         </p:nvSpPr>
@@ -14296,7 +15201,7 @@
       </p:sp>
       <p:sp>
         <p:nvSpPr>
-          <p:cNvPr id="10" name="Shape 8"/>
+          <p:cNvPr id="12" name="Shape 9"/>
           <p:cNvSpPr/>
           <p:nvPr/>
         </p:nvSpPr>
@@ -14323,7 +15228,7 @@
       </p:sp>
       <p:sp>
         <p:nvSpPr>
-          <p:cNvPr id="11" name="Text 9"/>
+          <p:cNvPr id="13" name="Text 10"/>
           <p:cNvSpPr txBox="1"/>
           <p:nvPr/>
         </p:nvSpPr>
@@ -14365,7 +15270,7 @@
       </p:sp>
       <p:sp>
         <p:nvSpPr>
-          <p:cNvPr id="12" name="Shape 10"/>
+          <p:cNvPr id="14" name="Shape 11"/>
           <p:cNvSpPr/>
           <p:nvPr/>
         </p:nvSpPr>
@@ -14392,7 +15297,7 @@
       </p:sp>
       <p:sp>
         <p:nvSpPr>
-          <p:cNvPr id="13" name="Text 11"/>
+          <p:cNvPr id="15" name="Text 12"/>
           <p:cNvSpPr txBox="1"/>
           <p:nvPr/>
         </p:nvSpPr>
@@ -14434,7 +15339,7 @@
       </p:sp>
       <p:sp>
         <p:nvSpPr>
-          <p:cNvPr id="14" name="Shape 12"/>
+          <p:cNvPr id="16" name="Shape 13"/>
           <p:cNvSpPr/>
           <p:nvPr/>
         </p:nvSpPr>
@@ -14461,7 +15366,7 @@
       </p:sp>
       <p:sp>
         <p:nvSpPr>
-          <p:cNvPr id="15" name="Shape 13"/>
+          <p:cNvPr id="17" name="Shape 14"/>
           <p:cNvSpPr/>
           <p:nvPr/>
         </p:nvSpPr>
@@ -14481,7 +15386,7 @@
       </p:sp>
       <p:sp>
         <p:nvSpPr>
-          <p:cNvPr id="16" name="Text 14"/>
+          <p:cNvPr id="18" name="Text 15"/>
           <p:cNvSpPr txBox="1"/>
           <p:nvPr/>
         </p:nvSpPr>
@@ -14520,7 +15425,7 @@
       </p:sp>
       <p:sp>
         <p:nvSpPr>
-          <p:cNvPr id="17" name="Text 15"/>
+          <p:cNvPr id="19" name="Text 16"/>
           <p:cNvSpPr txBox="1"/>
           <p:nvPr/>
         </p:nvSpPr>
@@ -14582,7 +15487,7 @@
       </p:sp>
       <p:sp>
         <p:nvSpPr>
-          <p:cNvPr id="18" name="Shape 16"/>
+          <p:cNvPr id="20" name="Shape 17"/>
           <p:cNvSpPr/>
           <p:nvPr/>
         </p:nvSpPr>
@@ -14609,7 +15514,7 @@
       </p:sp>
       <p:sp>
         <p:nvSpPr>
-          <p:cNvPr id="19" name="Shape 17"/>
+          <p:cNvPr id="21" name="Shape 18"/>
           <p:cNvSpPr/>
           <p:nvPr/>
         </p:nvSpPr>
@@ -14629,7 +15534,7 @@
       </p:sp>
       <p:sp>
         <p:nvSpPr>
-          <p:cNvPr id="20" name="Text 18"/>
+          <p:cNvPr id="22" name="Text 19"/>
           <p:cNvSpPr txBox="1"/>
           <p:nvPr/>
         </p:nvSpPr>
@@ -14668,7 +15573,7 @@
       </p:sp>
       <p:sp>
         <p:nvSpPr>
-          <p:cNvPr id="21" name="Text 19"/>
+          <p:cNvPr id="23" name="Text 20"/>
           <p:cNvSpPr txBox="1"/>
           <p:nvPr/>
         </p:nvSpPr>
